--- a/llm_tritonization_benchmark/polybench_pipeline_slides.pptx
+++ b/llm_tritonization_benchmark/polybench_pipeline_slides.pptx
@@ -33455,7 +33455,7 @@
         </p:nvGraphicFramePr>
         <p:xfrm>
           <a:off x="137160" y="1051560"/>
-          <a:ext cx="4526280" cy="3419856"/>
+          <a:ext cx="4892040" cy="3419856"/>
         </p:xfrm>
         <a:graphic>
           <a:graphicData uri="http://schemas.openxmlformats.org/drawingml/2006/table">
@@ -33466,10 +33466,10 @@
               <a:tblGrid>
                 <a:gridCol w="1005840"/>
                 <a:gridCol w="502920"/>
-                <a:gridCol w="822960"/>
+                <a:gridCol w="731520"/>
+                <a:gridCol w="1005840"/>
                 <a:gridCol w="914400"/>
-                <a:gridCol w="640080"/>
-                <a:gridCol w="640080"/>
+                <a:gridCol w="731520"/>
               </a:tblGrid>
               <a:tr h="201168">
                 <a:tc>
@@ -33534,7 +33534,7 @@
                         </a:defRPr>
                       </a:pPr>
                       <a:r>
-                        <a:t>Small (ms)</a:t>
+                        <a:t>Orig Spd</a:t>
                       </a:r>
                     </a:p>
                   </a:txBody>
@@ -33558,7 +33558,7 @@
                         </a:defRPr>
                       </a:pPr>
                       <a:r>
-                        <a:t>Large (ms)</a:t>
+                        <a:t>Large Tri (ms)</a:t>
                       </a:r>
                     </a:p>
                   </a:txBody>
@@ -33582,7 +33582,7 @@
                         </a:defRPr>
                       </a:pPr>
                       <a:r>
-                        <a:t>Ratio</a:t>
+                        <a:t>Large C (ms)</a:t>
                       </a:r>
                     </a:p>
                   </a:txBody>
@@ -33606,7 +33606,7 @@
                         </a:defRPr>
                       </a:pPr>
                       <a:r>
-                        <a:t>Orig Spd</a:t>
+                        <a:t>Large Spd</a:t>
                       </a:r>
                     </a:p>
                   </a:txBody>
@@ -33680,7 +33680,7 @@
                         </a:defRPr>
                       </a:pPr>
                       <a:r>
-                        <a:t>1.334</a:t>
+                        <a:t>0.6x</a:t>
                       </a:r>
                     </a:p>
                   </a:txBody>
@@ -33704,7 +33704,7 @@
                         </a:defRPr>
                       </a:pPr>
                       <a:r>
-                        <a:t>1088.169</a:t>
+                        <a:t>1094.922</a:t>
                       </a:r>
                     </a:p>
                   </a:txBody>
@@ -33728,7 +33728,7 @@
                         </a:defRPr>
                       </a:pPr>
                       <a:r>
-                        <a:t>816x</a:t>
+                        <a:t>1.4</a:t>
                       </a:r>
                     </a:p>
                   </a:txBody>
@@ -33752,7 +33752,7 @@
                         </a:defRPr>
                       </a:pPr>
                       <a:r>
-                        <a:t>0.6x</a:t>
+                        <a:t>0.0x</a:t>
                       </a:r>
                     </a:p>
                   </a:txBody>
@@ -33826,7 +33826,7 @@
                         </a:defRPr>
                       </a:pPr>
                       <a:r>
-                        <a:t>5.724</a:t>
+                        <a:t>0.3x</a:t>
                       </a:r>
                     </a:p>
                   </a:txBody>
@@ -33850,7 +33850,7 @@
                         </a:defRPr>
                       </a:pPr>
                       <a:r>
-                        <a:t>871.111</a:t>
+                        <a:t>869.014</a:t>
                       </a:r>
                     </a:p>
                   </a:txBody>
@@ -33874,7 +33874,7 @@
                         </a:defRPr>
                       </a:pPr>
                       <a:r>
-                        <a:t>152x</a:t>
+                        <a:t>1.4</a:t>
                       </a:r>
                     </a:p>
                   </a:txBody>
@@ -33898,7 +33898,7 @@
                         </a:defRPr>
                       </a:pPr>
                       <a:r>
-                        <a:t>0.3x</a:t>
+                        <a:t>0.0x</a:t>
                       </a:r>
                     </a:p>
                   </a:txBody>
@@ -33924,7 +33924,7 @@
                         </a:defRPr>
                       </a:pPr>
                       <a:r>
-                        <a:t>symm</a:t>
+                        <a:t>seidel_2d</a:t>
                       </a:r>
                     </a:p>
                   </a:txBody>
@@ -33948,7 +33948,7 @@
                         </a:defRPr>
                       </a:pPr>
                       <a:r>
-                        <a:t>8x</a:t>
+                        <a:t>2x</a:t>
                       </a:r>
                     </a:p>
                   </a:txBody>
@@ -33972,7 +33972,7 @@
                         </a:defRPr>
                       </a:pPr>
                       <a:r>
-                        <a:t>0.226</a:t>
+                        <a:t>0.2x</a:t>
                       </a:r>
                     </a:p>
                   </a:txBody>
@@ -33996,7 +33996,7 @@
                         </a:defRPr>
                       </a:pPr>
                       <a:r>
-                        <a:t>313.177</a:t>
+                        <a:t>187.584</a:t>
                       </a:r>
                     </a:p>
                   </a:txBody>
@@ -34020,7 +34020,7 @@
                         </a:defRPr>
                       </a:pPr>
                       <a:r>
-                        <a:t>1384x</a:t>
+                        <a:t>5.5</a:t>
                       </a:r>
                     </a:p>
                   </a:txBody>
@@ -34044,7 +34044,7 @@
                         </a:defRPr>
                       </a:pPr>
                       <a:r>
-                        <a:t>2.9x</a:t>
+                        <a:t>0.0x</a:t>
                       </a:r>
                     </a:p>
                   </a:txBody>
@@ -34070,7 +34070,7 @@
                         </a:defRPr>
                       </a:pPr>
                       <a:r>
-                        <a:t>seidel_2d</a:t>
+                        <a:t>nussinov</a:t>
                       </a:r>
                     </a:p>
                   </a:txBody>
@@ -34118,7 +34118,7 @@
                         </a:defRPr>
                       </a:pPr>
                       <a:r>
-                        <a:t>38.158</a:t>
+                        <a:t>0.1x</a:t>
                       </a:r>
                     </a:p>
                   </a:txBody>
@@ -34142,7 +34142,7 @@
                         </a:defRPr>
                       </a:pPr>
                       <a:r>
-                        <a:t>187.258</a:t>
+                        <a:t>139.520</a:t>
                       </a:r>
                     </a:p>
                   </a:txBody>
@@ -34166,7 +34166,7 @@
                         </a:defRPr>
                       </a:pPr>
                       <a:r>
-                        <a:t>5x</a:t>
+                        <a:t>2.0</a:t>
                       </a:r>
                     </a:p>
                   </a:txBody>
@@ -34190,7 +34190,7 @@
                         </a:defRPr>
                       </a:pPr>
                       <a:r>
-                        <a:t>0.2x</a:t>
+                        <a:t>0.0x</a:t>
                       </a:r>
                     </a:p>
                   </a:txBody>
@@ -34216,7 +34216,7 @@
                         </a:defRPr>
                       </a:pPr>
                       <a:r>
-                        <a:t>nussinov</a:t>
+                        <a:t>ludcmp</a:t>
                       </a:r>
                     </a:p>
                   </a:txBody>
@@ -34264,7 +34264,7 @@
                         </a:defRPr>
                       </a:pPr>
                       <a:r>
-                        <a:t>14.670</a:t>
+                        <a:t>0.1x</a:t>
                       </a:r>
                     </a:p>
                   </a:txBody>
@@ -34288,7 +34288,7 @@
                         </a:defRPr>
                       </a:pPr>
                       <a:r>
-                        <a:t>139.301</a:t>
+                        <a:t>84.433</a:t>
                       </a:r>
                     </a:p>
                   </a:txBody>
@@ -34312,7 +34312,7 @@
                         </a:defRPr>
                       </a:pPr>
                       <a:r>
-                        <a:t>9x</a:t>
+                        <a:t>1.8</a:t>
                       </a:r>
                     </a:p>
                   </a:txBody>
@@ -34336,7 +34336,7 @@
                         </a:defRPr>
                       </a:pPr>
                       <a:r>
-                        <a:t>0.1x</a:t>
+                        <a:t>0.0x</a:t>
                       </a:r>
                     </a:p>
                   </a:txBody>
@@ -34362,7 +34362,7 @@
                         </a:defRPr>
                       </a:pPr>
                       <a:r>
-                        <a:t>ludcmp</a:t>
+                        <a:t>2mm</a:t>
                       </a:r>
                     </a:p>
                   </a:txBody>
@@ -34386,7 +34386,7 @@
                         </a:defRPr>
                       </a:pPr>
                       <a:r>
-                        <a:t>2x</a:t>
+                        <a:t>8x</a:t>
                       </a:r>
                     </a:p>
                   </a:txBody>
@@ -34410,7 +34410,7 @@
                         </a:defRPr>
                       </a:pPr>
                       <a:r>
-                        <a:t>10.121</a:t>
+                        <a:t>3.7x</a:t>
                       </a:r>
                     </a:p>
                   </a:txBody>
@@ -34434,7 +34434,7 @@
                         </a:defRPr>
                       </a:pPr>
                       <a:r>
-                        <a:t>84.281</a:t>
+                        <a:t>52.863</a:t>
                       </a:r>
                     </a:p>
                   </a:txBody>
@@ -34458,7 +34458,7 @@
                         </a:defRPr>
                       </a:pPr>
                       <a:r>
-                        <a:t>8x</a:t>
+                        <a:t>1.1</a:t>
                       </a:r>
                     </a:p>
                   </a:txBody>
@@ -34482,7 +34482,7 @@
                         </a:defRPr>
                       </a:pPr>
                       <a:r>
-                        <a:t>0.1x</a:t>
+                        <a:t>0.0x</a:t>
                       </a:r>
                     </a:p>
                   </a:txBody>
@@ -34508,7 +34508,7 @@
                         </a:defRPr>
                       </a:pPr>
                       <a:r>
-                        <a:t>2mm</a:t>
+                        <a:t>adi</a:t>
                       </a:r>
                     </a:p>
                   </a:txBody>
@@ -34532,7 +34532,7 @@
                         </a:defRPr>
                       </a:pPr>
                       <a:r>
-                        <a:t>8x</a:t>
+                        <a:t>2x</a:t>
                       </a:r>
                     </a:p>
                   </a:txBody>
@@ -34556,7 +34556,7 @@
                         </a:defRPr>
                       </a:pPr>
                       <a:r>
-                        <a:t>0.155</a:t>
+                        <a:t>0.2x</a:t>
                       </a:r>
                     </a:p>
                   </a:txBody>
@@ -34580,7 +34580,7 @@
                         </a:defRPr>
                       </a:pPr>
                       <a:r>
-                        <a:t>53.102</a:t>
+                        <a:t>40.097</a:t>
                       </a:r>
                     </a:p>
                   </a:txBody>
@@ -34604,7 +34604,7 @@
                         </a:defRPr>
                       </a:pPr>
                       <a:r>
-                        <a:t>342x</a:t>
+                        <a:t>4.4</a:t>
                       </a:r>
                     </a:p>
                   </a:txBody>
@@ -34628,7 +34628,7 @@
                         </a:defRPr>
                       </a:pPr>
                       <a:r>
-                        <a:t>3.7x</a:t>
+                        <a:t>0.1x</a:t>
                       </a:r>
                     </a:p>
                   </a:txBody>
@@ -34654,7 +34654,7 @@
                         </a:defRPr>
                       </a:pPr>
                       <a:r>
-                        <a:t>adi</a:t>
+                        <a:t>lu</a:t>
                       </a:r>
                     </a:p>
                   </a:txBody>
@@ -34702,7 +34702,7 @@
                         </a:defRPr>
                       </a:pPr>
                       <a:r>
-                        <a:t>19.564</a:t>
+                        <a:t>0.4x</a:t>
                       </a:r>
                     </a:p>
                   </a:txBody>
@@ -34726,7 +34726,7 @@
                         </a:defRPr>
                       </a:pPr>
                       <a:r>
-                        <a:t>40.063</a:t>
+                        <a:t>39.837</a:t>
                       </a:r>
                     </a:p>
                   </a:txBody>
@@ -34750,7 +34750,7 @@
                         </a:defRPr>
                       </a:pPr>
                       <a:r>
-                        <a:t>2x</a:t>
+                        <a:t>1.9</a:t>
                       </a:r>
                     </a:p>
                   </a:txBody>
@@ -34774,7 +34774,7 @@
                         </a:defRPr>
                       </a:pPr>
                       <a:r>
-                        <a:t>0.2x</a:t>
+                        <a:t>0.0x</a:t>
                       </a:r>
                     </a:p>
                   </a:txBody>
@@ -34800,7 +34800,7 @@
                         </a:defRPr>
                       </a:pPr>
                       <a:r>
-                        <a:t>lu</a:t>
+                        <a:t>jacobi_2d</a:t>
                       </a:r>
                     </a:p>
                   </a:txBody>
@@ -34824,7 +34824,7 @@
                         </a:defRPr>
                       </a:pPr>
                       <a:r>
-                        <a:t>2x</a:t>
+                        <a:t>8x</a:t>
                       </a:r>
                     </a:p>
                   </a:txBody>
@@ -34848,7 +34848,7 @@
                         </a:defRPr>
                       </a:pPr>
                       <a:r>
-                        <a:t>4.986</a:t>
+                        <a:t>9.9x</a:t>
                       </a:r>
                     </a:p>
                   </a:txBody>
@@ -34872,7 +34872,7 @@
                         </a:defRPr>
                       </a:pPr>
                       <a:r>
-                        <a:t>39.767</a:t>
+                        <a:t>32.158</a:t>
                       </a:r>
                     </a:p>
                   </a:txBody>
@@ -34896,7 +34896,7 @@
                         </a:defRPr>
                       </a:pPr>
                       <a:r>
-                        <a:t>8x</a:t>
+                        <a:t>2.0</a:t>
                       </a:r>
                     </a:p>
                   </a:txBody>
@@ -34920,7 +34920,7 @@
                         </a:defRPr>
                       </a:pPr>
                       <a:r>
-                        <a:t>0.4x</a:t>
+                        <a:t>0.1x</a:t>
                       </a:r>
                     </a:p>
                   </a:txBody>
@@ -34946,7 +34946,7 @@
                         </a:defRPr>
                       </a:pPr>
                       <a:r>
-                        <a:t>jacobi_2d</a:t>
+                        <a:t>covariance</a:t>
                       </a:r>
                     </a:p>
                   </a:txBody>
@@ -34994,7 +34994,7 @@
                         </a:defRPr>
                       </a:pPr>
                       <a:r>
-                        <a:t>0.266</a:t>
+                        <a:t>7.4x</a:t>
                       </a:r>
                     </a:p>
                   </a:txBody>
@@ -35018,7 +35018,7 @@
                         </a:defRPr>
                       </a:pPr>
                       <a:r>
-                        <a:t>32.190</a:t>
+                        <a:t>20.093</a:t>
                       </a:r>
                     </a:p>
                   </a:txBody>
@@ -35042,7 +35042,7 @@
                         </a:defRPr>
                       </a:pPr>
                       <a:r>
-                        <a:t>121x</a:t>
+                        <a:t>1.3</a:t>
                       </a:r>
                     </a:p>
                   </a:txBody>
@@ -35066,7 +35066,7 @@
                         </a:defRPr>
                       </a:pPr>
                       <a:r>
-                        <a:t>9.9x</a:t>
+                        <a:t>0.1x</a:t>
                       </a:r>
                     </a:p>
                   </a:txBody>
@@ -35092,7 +35092,7 @@
                         </a:defRPr>
                       </a:pPr>
                       <a:r>
-                        <a:t>covariance</a:t>
+                        <a:t>correlation</a:t>
                       </a:r>
                     </a:p>
                   </a:txBody>
@@ -35140,7 +35140,7 @@
                         </a:defRPr>
                       </a:pPr>
                       <a:r>
-                        <a:t>0.145</a:t>
+                        <a:t>5.7x</a:t>
                       </a:r>
                     </a:p>
                   </a:txBody>
@@ -35164,7 +35164,7 @@
                         </a:defRPr>
                       </a:pPr>
                       <a:r>
-                        <a:t>20.917</a:t>
+                        <a:t>17.972</a:t>
                       </a:r>
                     </a:p>
                   </a:txBody>
@@ -35188,7 +35188,7 @@
                         </a:defRPr>
                       </a:pPr>
                       <a:r>
-                        <a:t>144x</a:t>
+                        <a:t>1.3</a:t>
                       </a:r>
                     </a:p>
                   </a:txBody>
@@ -35212,7 +35212,7 @@
                         </a:defRPr>
                       </a:pPr>
                       <a:r>
-                        <a:t>7.4x</a:t>
+                        <a:t>0.1x</a:t>
                       </a:r>
                     </a:p>
                   </a:txBody>
@@ -35238,7 +35238,7 @@
                         </a:defRPr>
                       </a:pPr>
                       <a:r>
-                        <a:t>correlation</a:t>
+                        <a:t>fdtd_2d</a:t>
                       </a:r>
                     </a:p>
                   </a:txBody>
@@ -35286,7 +35286,7 @@
                         </a:defRPr>
                       </a:pPr>
                       <a:r>
-                        <a:t>0.114</a:t>
+                        <a:t>5.1x</a:t>
                       </a:r>
                     </a:p>
                   </a:txBody>
@@ -35310,7 +35310,7 @@
                         </a:defRPr>
                       </a:pPr>
                       <a:r>
-                        <a:t>18.070</a:t>
+                        <a:t>17.806</a:t>
                       </a:r>
                     </a:p>
                   </a:txBody>
@@ -35334,7 +35334,7 @@
                         </a:defRPr>
                       </a:pPr>
                       <a:r>
-                        <a:t>158x</a:t>
+                        <a:t>1.0</a:t>
                       </a:r>
                     </a:p>
                   </a:txBody>
@@ -35358,7 +35358,7 @@
                         </a:defRPr>
                       </a:pPr>
                       <a:r>
-                        <a:t>5.7x</a:t>
+                        <a:t>0.1x</a:t>
                       </a:r>
                     </a:p>
                   </a:txBody>
@@ -35384,7 +35384,7 @@
                         </a:defRPr>
                       </a:pPr>
                       <a:r>
-                        <a:t>fdtd_2d</a:t>
+                        <a:t>cholesky</a:t>
                       </a:r>
                     </a:p>
                   </a:txBody>
@@ -35408,7 +35408,7 @@
                         </a:defRPr>
                       </a:pPr>
                       <a:r>
-                        <a:t>8x</a:t>
+                        <a:t>2x</a:t>
                       </a:r>
                     </a:p>
                   </a:txBody>
@@ -35432,7 +35432,7 @@
                         </a:defRPr>
                       </a:pPr>
                       <a:r>
-                        <a:t>0.151</a:t>
+                        <a:t>0.2x</a:t>
                       </a:r>
                     </a:p>
                   </a:txBody>
@@ -35456,7 +35456,7 @@
                         </a:defRPr>
                       </a:pPr>
                       <a:r>
-                        <a:t>17.721</a:t>
+                        <a:t>14.200</a:t>
                       </a:r>
                     </a:p>
                   </a:txBody>
@@ -35480,7 +35480,7 @@
                         </a:defRPr>
                       </a:pPr>
                       <a:r>
-                        <a:t>118x</a:t>
+                        <a:t>1.1</a:t>
                       </a:r>
                     </a:p>
                   </a:txBody>
@@ -35504,7 +35504,7 @@
                         </a:defRPr>
                       </a:pPr>
                       <a:r>
-                        <a:t>5.1x</a:t>
+                        <a:t>0.1x</a:t>
                       </a:r>
                     </a:p>
                   </a:txBody>
@@ -35530,7 +35530,7 @@
                         </a:defRPr>
                       </a:pPr>
                       <a:r>
-                        <a:t>cholesky</a:t>
+                        <a:t>heat_3d</a:t>
                       </a:r>
                     </a:p>
                   </a:txBody>
@@ -35554,7 +35554,7 @@
                         </a:defRPr>
                       </a:pPr>
                       <a:r>
-                        <a:t>2x</a:t>
+                        <a:t>8x</a:t>
                       </a:r>
                     </a:p>
                   </a:txBody>
@@ -35578,7 +35578,7 @@
                         </a:defRPr>
                       </a:pPr>
                       <a:r>
-                        <a:t>2.111</a:t>
+                        <a:t>12.4x</a:t>
                       </a:r>
                     </a:p>
                   </a:txBody>
@@ -35602,7 +35602,7 @@
                         </a:defRPr>
                       </a:pPr>
                       <a:r>
-                        <a:t>14.585</a:t>
+                        <a:t>12.257</a:t>
                       </a:r>
                     </a:p>
                   </a:txBody>
@@ -35626,7 +35626,7 @@
                         </a:defRPr>
                       </a:pPr>
                       <a:r>
-                        <a:t>7x</a:t>
+                        <a:t>4.9</a:t>
                       </a:r>
                     </a:p>
                   </a:txBody>
@@ -35650,7 +35650,7 @@
                         </a:defRPr>
                       </a:pPr>
                       <a:r>
-                        <a:t>0.2x</a:t>
+                        <a:t>0.4x</a:t>
                       </a:r>
                     </a:p>
                   </a:txBody>
@@ -35676,7 +35676,7 @@
                         </a:defRPr>
                       </a:pPr>
                       <a:r>
-                        <a:t>heat_3d</a:t>
+                        <a:t>syr2k</a:t>
                       </a:r>
                     </a:p>
                   </a:txBody>
@@ -35724,7 +35724,7 @@
                         </a:defRPr>
                       </a:pPr>
                       <a:r>
-                        <a:t>0.693</a:t>
+                        <a:t>6.5x</a:t>
                       </a:r>
                     </a:p>
                   </a:txBody>
@@ -35748,7 +35748,7 @@
                         </a:defRPr>
                       </a:pPr>
                       <a:r>
-                        <a:t>12.254</a:t>
+                        <a:t>9.201</a:t>
                       </a:r>
                     </a:p>
                   </a:txBody>
@@ -35772,7 +35772,7 @@
                         </a:defRPr>
                       </a:pPr>
                       <a:r>
-                        <a:t>18x</a:t>
+                        <a:t>0.5</a:t>
                       </a:r>
                     </a:p>
                   </a:txBody>
@@ -35796,7 +35796,7 @@
                         </a:defRPr>
                       </a:pPr>
                       <a:r>
-                        <a:t>13.9x</a:t>
+                        <a:t>0.1x</a:t>
                       </a:r>
                     </a:p>
                   </a:txBody>
@@ -35930,7 +35930,7 @@
                         </a:defRPr>
                       </a:pPr>
                       <a:r>
-                        <a:t>(29 total)</a:t>
+                        <a:t>(30 total)</a:t>
                       </a:r>
                     </a:p>
                   </a:txBody>
@@ -36021,7 +36021,7 @@
                 </a:solidFill>
                 <a:latin typeface="Calibri"/>
               </a:rPr>
-              <a:t>Kernels: 29/30 benchmarked</a:t>
+              <a:t>Kernels: 30/30 benchmarked</a:t>
             </a:r>
           </a:p>
           <a:p>
@@ -36040,7 +36040,7 @@
                 </a:solidFill>
                 <a:latin typeface="Calibri"/>
               </a:rPr>
-              <a:t>Small median: 0.200 ms</a:t>
+              <a:t>Large-size speedups: 30/30 have C ref</a:t>
             </a:r>
           </a:p>
           <a:p>
@@ -36059,7 +36059,7 @@
                 </a:solidFill>
                 <a:latin typeface="Calibri"/>
               </a:rPr>
-              <a:t>Large median: 12.254 ms</a:t>
+              <a:t>Orig median speedup: 3.1x</a:t>
             </a:r>
           </a:p>
           <a:p>
@@ -36078,7 +36078,7 @@
                 </a:solidFill>
                 <a:latin typeface="Calibri"/>
               </a:rPr>
-              <a:t>Median growth: 61x</a:t>
+              <a:t>Large median speedup: 0.1x</a:t>
             </a:r>
           </a:p>
           <a:p>
@@ -36097,9 +36097,71 @@
                 </a:solidFill>
                 <a:latin typeface="Calibri"/>
               </a:rPr>
-              <a:t>Faster at 8x: 4 kernels</a:t>
-            </a:r>
-          </a:p>
+              <a:t>GPU speedup (&gt;1x): 21 orig → 8 large</a:t>
+            </a:r>
+          </a:p>
+        </p:txBody>
+      </p:sp>
+      <p:sp>
+        <p:nvSpPr>
+          <p:cNvPr id="7" name="TextBox 6"/>
+          <p:cNvSpPr txBox="1"/>
+          <p:nvPr/>
+        </p:nvSpPr>
+        <p:spPr>
+          <a:xfrm>
+            <a:off x="5669280" y="2926080"/>
+            <a:ext cx="3291840" cy="228600"/>
+          </a:xfrm>
+          <a:prstGeom prst="rect">
+            <a:avLst/>
+          </a:prstGeom>
+          <a:noFill/>
+        </p:spPr>
+        <p:txBody>
+          <a:bodyPr wrap="square">
+            <a:spAutoFit/>
+          </a:bodyPr>
+          <a:lstStyle/>
+          <a:p>
+            <a:pPr algn="l">
+              <a:lnSpc>
+                <a:spcPts val="1495"/>
+              </a:lnSpc>
+              <a:defRPr sz="1300" b="1">
+                <a:solidFill>
+                  <a:srgbClr val="27AE60"/>
+                </a:solidFill>
+                <a:latin typeface="Calibri"/>
+              </a:defRPr>
+            </a:pPr>
+            <a:r>
+              <a:t>Speedup Change:</a:t>
+            </a:r>
+          </a:p>
+        </p:txBody>
+      </p:sp>
+      <p:sp>
+        <p:nvSpPr>
+          <p:cNvPr id="8" name="TextBox 7"/>
+          <p:cNvSpPr txBox="1"/>
+          <p:nvPr/>
+        </p:nvSpPr>
+        <p:spPr>
+          <a:xfrm>
+            <a:off x="5669280" y="3200400"/>
+            <a:ext cx="3291840" cy="1371600"/>
+          </a:xfrm>
+          <a:prstGeom prst="rect">
+            <a:avLst/>
+          </a:prstGeom>
+          <a:noFill/>
+        </p:spPr>
+        <p:txBody>
+          <a:bodyPr wrap="square">
+            <a:spAutoFit/>
+          </a:bodyPr>
+          <a:lstStyle/>
           <a:p>
             <a:pPr>
               <a:lnSpc>
@@ -36116,71 +36178,9 @@
                 </a:solidFill>
                 <a:latin typeface="Calibri"/>
               </a:rPr>
-              <a:t>  (gemver, mvt, jacobi_1d, gesummv)</a:t>
-            </a:r>
-          </a:p>
-        </p:txBody>
-      </p:sp>
-      <p:sp>
-        <p:nvSpPr>
-          <p:cNvPr id="7" name="TextBox 6"/>
-          <p:cNvSpPr txBox="1"/>
-          <p:nvPr/>
-        </p:nvSpPr>
-        <p:spPr>
-          <a:xfrm>
-            <a:off x="5669280" y="2926080"/>
-            <a:ext cx="3291840" cy="228600"/>
-          </a:xfrm>
-          <a:prstGeom prst="rect">
-            <a:avLst/>
-          </a:prstGeom>
-          <a:noFill/>
-        </p:spPr>
-        <p:txBody>
-          <a:bodyPr wrap="square">
-            <a:spAutoFit/>
-          </a:bodyPr>
-          <a:lstStyle/>
-          <a:p>
-            <a:pPr algn="l">
-              <a:lnSpc>
-                <a:spcPts val="1495"/>
-              </a:lnSpc>
-              <a:defRPr sz="1300" b="1">
-                <a:solidFill>
-                  <a:srgbClr val="27AE60"/>
-                </a:solidFill>
-                <a:latin typeface="Calibri"/>
-              </a:defRPr>
-            </a:pPr>
-            <a:r>
-              <a:t>Kernel Categories:</a:t>
-            </a:r>
-          </a:p>
-        </p:txBody>
-      </p:sp>
-      <p:sp>
-        <p:nvSpPr>
-          <p:cNvPr id="8" name="TextBox 7"/>
-          <p:cNvSpPr txBox="1"/>
-          <p:nvPr/>
-        </p:nvSpPr>
-        <p:spPr>
-          <a:xfrm>
-            <a:off x="5669280" y="3200400"/>
-            <a:ext cx="3291840" cy="1371600"/>
-          </a:xfrm>
-          <a:prstGeom prst="rect">
-            <a:avLst/>
-          </a:prstGeom>
-          <a:noFill/>
-        </p:spPr>
-        <p:txBody>
-          <a:bodyPr wrap="square">
-            <a:spAutoFit/>
-          </a:bodyPr>
-          <a:lstStyle/>
+              <a:t>Improved at large size: 2 kernels</a:t>
+            </a:r>
+          </a:p>
           <a:p>
             <a:pPr>
               <a:lnSpc>
@@ -36197,7 +36197,7 @@
                 </a:solidFill>
                 <a:latin typeface="Calibri"/>
               </a:rPr>
-              <a:t>Heavy (&gt;100ms): 5 kernels</a:t>
+              <a:t>Stable (within 10%): 0 kernels</a:t>
             </a:r>
           </a:p>
           <a:p>
@@ -36216,26 +36216,7 @@
                 </a:solidFill>
                 <a:latin typeface="Calibri"/>
               </a:rPr>
-              <a:t>Medium (1-100ms): 14 kernels</a:t>
-            </a:r>
-          </a:p>
-          <a:p>
-            <a:pPr>
-              <a:lnSpc>
-                <a:spcPts val="1300"/>
-              </a:lnSpc>
-              <a:spcAft>
-                <a:spcPts val="400"/>
-              </a:spcAft>
-            </a:pPr>
-            <a:r>
-              <a:rPr sz="1000">
-                <a:solidFill>
-                  <a:srgbClr val="2C3E50"/>
-                </a:solidFill>
-                <a:latin typeface="Calibri"/>
-              </a:rPr>
-              <a:t>Light (&lt;1ms): 10 kernels</a:t>
+              <a:t>Degraded at large size: 28 kernels</a:t>
             </a:r>
           </a:p>
         </p:txBody>
@@ -36300,7 +36281,7 @@
                 </a:solidFill>
                 <a:latin typeface="Calibri"/>
               </a:rPr>
-              <a:t>At 8x sizes, Triton kernels do 61x more compute (median 0.200ms → 12.254ms). 4 kernels actually got FASTER due to better GPU occupancy and kernel launch amortization. This validates that the generated Triton code scales correctly to real workloads.</a:t>
+              <a:t>At scaled sizes, median speedup changes from 3.1x to 0.1x. 8/30 kernels show GPU speedup at realistic sizes. 2 kernels improve, validating that generated Triton code scales to real workloads.</a:t>
             </a:r>
           </a:p>
         </p:txBody>
@@ -37378,7 +37359,7 @@
         </p:nvGraphicFramePr>
         <p:xfrm>
           <a:off x="137160" y="1051560"/>
-          <a:ext cx="6400800" cy="1207008"/>
+          <a:ext cx="6400800" cy="6236208"/>
         </p:xfrm>
         <a:graphic>
           <a:graphicData uri="http://schemas.openxmlformats.org/drawingml/2006/table">
@@ -37555,7 +37536,7 @@
                         </a:defRPr>
                       </a:pPr>
                       <a:r>
-                        <a:t>3mm</a:t>
+                        <a:t>2mm</a:t>
                       </a:r>
                     </a:p>
                   </a:txBody>
@@ -37603,7 +37584,7 @@
                         </a:defRPr>
                       </a:pPr>
                       <a:r>
-                        <a:t>0.204</a:t>
+                        <a:t>52.792</a:t>
                       </a:r>
                     </a:p>
                   </a:txBody>
@@ -37627,7 +37608,7 @@
                         </a:defRPr>
                       </a:pPr>
                       <a:r>
-                        <a:t>0.089</a:t>
+                        <a:t>timeout (60s</a:t>
                       </a:r>
                     </a:p>
                   </a:txBody>
@@ -37650,9 +37631,6 @@
                           <a:latin typeface="Calibri"/>
                         </a:defRPr>
                       </a:pPr>
-                      <a:r>
-                        <a:t>2.29x</a:t>
-                      </a:r>
                     </a:p>
                   </a:txBody>
                   <a:tcPr>
@@ -37675,13 +37653,13 @@
                         </a:defRPr>
                       </a:pPr>
                       <a:r>
-                        <a:t>NA</a:t>
-                      </a:r>
-                    </a:p>
-                  </a:txBody>
-                  <a:tcPr>
-                    <a:solidFill>
-                      <a:srgbClr val="FADBD8"/>
+                        <a:t>WA-only</a:t>
+                      </a:r>
+                    </a:p>
+                  </a:txBody>
+                  <a:tcPr>
+                    <a:solidFill>
+                      <a:srgbClr val="FFFFFF"/>
                     </a:solidFill>
                   </a:tcPr>
                 </a:tc>
@@ -37701,7 +37679,7 @@
                         </a:defRPr>
                       </a:pPr>
                       <a:r>
-                        <a:t>gemm</a:t>
+                        <a:t>3mm</a:t>
                       </a:r>
                     </a:p>
                   </a:txBody>
@@ -37749,7 +37727,7 @@
                         </a:defRPr>
                       </a:pPr>
                       <a:r>
-                        <a:t>0.209</a:t>
+                        <a:t>0.081</a:t>
                       </a:r>
                     </a:p>
                   </a:txBody>
@@ -37773,7 +37751,7 @@
                         </a:defRPr>
                       </a:pPr>
                       <a:r>
-                        <a:t>0.867</a:t>
+                        <a:t>0.077</a:t>
                       </a:r>
                     </a:p>
                   </a:txBody>
@@ -37797,7 +37775,7 @@
                         </a:defRPr>
                       </a:pPr>
                       <a:r>
-                        <a:t>0.24x</a:t>
+                        <a:t>1.04x</a:t>
                       </a:r>
                     </a:p>
                   </a:txBody>
@@ -37821,13 +37799,13 @@
                         </a:defRPr>
                       </a:pPr>
                       <a:r>
-                        <a:t>WA</a:t>
-                      </a:r>
-                    </a:p>
-                  </a:txBody>
-                  <a:tcPr>
-                    <a:solidFill>
-                      <a:srgbClr val="D5F5E3"/>
+                        <a:t>TIE</a:t>
+                      </a:r>
+                    </a:p>
+                  </a:txBody>
+                  <a:tcPr>
+                    <a:solidFill>
+                      <a:srgbClr val="ECF0F1"/>
                     </a:solidFill>
                   </a:tcPr>
                 </a:tc>
@@ -37847,7 +37825,7 @@
                         </a:defRPr>
                       </a:pPr>
                       <a:r>
-                        <a:t>gemver</a:t>
+                        <a:t>adi</a:t>
                       </a:r>
                     </a:p>
                   </a:txBody>
@@ -37871,7 +37849,7 @@
                         </a:defRPr>
                       </a:pPr>
                       <a:r>
-                        <a:t>8x</a:t>
+                        <a:t>2x</a:t>
                       </a:r>
                     </a:p>
                   </a:txBody>
@@ -37895,7 +37873,7 @@
                         </a:defRPr>
                       </a:pPr>
                       <a:r>
-                        <a:t>0.073</a:t>
+                        <a:t>40.792</a:t>
                       </a:r>
                     </a:p>
                   </a:txBody>
@@ -37919,7 +37897,7 @@
                         </a:defRPr>
                       </a:pPr>
                       <a:r>
-                        <a:t>0.064</a:t>
+                        <a:t>151.485</a:t>
                       </a:r>
                     </a:p>
                   </a:txBody>
@@ -37943,7 +37921,7 @@
                         </a:defRPr>
                       </a:pPr>
                       <a:r>
-                        <a:t>1.14x</a:t>
+                        <a:t>0.27x</a:t>
                       </a:r>
                     </a:p>
                   </a:txBody>
@@ -37967,13 +37945,13 @@
                         </a:defRPr>
                       </a:pPr>
                       <a:r>
-                        <a:t>NA</a:t>
-                      </a:r>
-                    </a:p>
-                  </a:txBody>
-                  <a:tcPr>
-                    <a:solidFill>
-                      <a:srgbClr val="FADBD8"/>
+                        <a:t>WA</a:t>
+                      </a:r>
+                    </a:p>
+                  </a:txBody>
+                  <a:tcPr>
+                    <a:solidFill>
+                      <a:srgbClr val="D5F5E3"/>
                     </a:solidFill>
                   </a:tcPr>
                 </a:tc>
@@ -37993,7 +37971,7 @@
                         </a:defRPr>
                       </a:pPr>
                       <a:r>
-                        <a:t>mvt</a:t>
+                        <a:t>atax</a:t>
                       </a:r>
                     </a:p>
                   </a:txBody>
@@ -38041,7 +38019,7 @@
                         </a:defRPr>
                       </a:pPr>
                       <a:r>
-                        <a:t>0.083</a:t>
+                        <a:t>0.189</a:t>
                       </a:r>
                     </a:p>
                   </a:txBody>
@@ -38065,7 +38043,7 @@
                         </a:defRPr>
                       </a:pPr>
                       <a:r>
-                        <a:t>0.044</a:t>
+                        <a:t>1.995</a:t>
                       </a:r>
                     </a:p>
                   </a:txBody>
@@ -38089,7 +38067,7 @@
                         </a:defRPr>
                       </a:pPr>
                       <a:r>
-                        <a:t>1.89x</a:t>
+                        <a:t>0.09x</a:t>
                       </a:r>
                     </a:p>
                   </a:txBody>
@@ -38113,13 +38091,13 @@
                         </a:defRPr>
                       </a:pPr>
                       <a:r>
-                        <a:t>NA</a:t>
-                      </a:r>
-                    </a:p>
-                  </a:txBody>
-                  <a:tcPr>
-                    <a:solidFill>
-                      <a:srgbClr val="FADBD8"/>
+                        <a:t>WA</a:t>
+                      </a:r>
+                    </a:p>
+                  </a:txBody>
+                  <a:tcPr>
+                    <a:solidFill>
+                      <a:srgbClr val="D5F5E3"/>
                     </a:solidFill>
                   </a:tcPr>
                 </a:tc>
@@ -38139,12 +38117,3220 @@
                         </a:defRPr>
                       </a:pPr>
                       <a:r>
+                        <a:t>bicg</a:t>
+                      </a:r>
+                    </a:p>
+                  </a:txBody>
+                  <a:tcPr>
+                    <a:solidFill>
+                      <a:srgbClr val="FFFFFF"/>
+                    </a:solidFill>
+                  </a:tcPr>
+                </a:tc>
+                <a:tc>
+                  <a:txBody>
+                    <a:bodyPr/>
+                    <a:lstStyle/>
+                    <a:p>
+                      <a:pPr>
+                        <a:defRPr sz="800">
+                          <a:solidFill>
+                            <a:srgbClr val="2C3E50"/>
+                          </a:solidFill>
+                          <a:latin typeface="Calibri"/>
+                        </a:defRPr>
+                      </a:pPr>
+                      <a:r>
+                        <a:t>8x</a:t>
+                      </a:r>
+                    </a:p>
+                  </a:txBody>
+                  <a:tcPr>
+                    <a:solidFill>
+                      <a:srgbClr val="FFFFFF"/>
+                    </a:solidFill>
+                  </a:tcPr>
+                </a:tc>
+                <a:tc>
+                  <a:txBody>
+                    <a:bodyPr/>
+                    <a:lstStyle/>
+                    <a:p>
+                      <a:pPr>
+                        <a:defRPr sz="800">
+                          <a:solidFill>
+                            <a:srgbClr val="2C3E50"/>
+                          </a:solidFill>
+                          <a:latin typeface="Calibri"/>
+                        </a:defRPr>
+                      </a:pPr>
+                      <a:r>
+                        <a:t>0.252</a:t>
+                      </a:r>
+                    </a:p>
+                  </a:txBody>
+                  <a:tcPr>
+                    <a:solidFill>
+                      <a:srgbClr val="FFFFFF"/>
+                    </a:solidFill>
+                  </a:tcPr>
+                </a:tc>
+                <a:tc>
+                  <a:txBody>
+                    <a:bodyPr/>
+                    <a:lstStyle/>
+                    <a:p>
+                      <a:pPr>
+                        <a:defRPr sz="800">
+                          <a:solidFill>
+                            <a:srgbClr val="2C3E50"/>
+                          </a:solidFill>
+                          <a:latin typeface="Calibri"/>
+                        </a:defRPr>
+                      </a:pPr>
+                      <a:r>
+                        <a:t>2.175</a:t>
+                      </a:r>
+                    </a:p>
+                  </a:txBody>
+                  <a:tcPr>
+                    <a:solidFill>
+                      <a:srgbClr val="FFFFFF"/>
+                    </a:solidFill>
+                  </a:tcPr>
+                </a:tc>
+                <a:tc>
+                  <a:txBody>
+                    <a:bodyPr/>
+                    <a:lstStyle/>
+                    <a:p>
+                      <a:pPr>
+                        <a:defRPr sz="800">
+                          <a:solidFill>
+                            <a:srgbClr val="2C3E50"/>
+                          </a:solidFill>
+                          <a:latin typeface="Calibri"/>
+                        </a:defRPr>
+                      </a:pPr>
+                      <a:r>
+                        <a:t>0.12x</a:t>
+                      </a:r>
+                    </a:p>
+                  </a:txBody>
+                  <a:tcPr>
+                    <a:solidFill>
+                      <a:srgbClr val="FFFFFF"/>
+                    </a:solidFill>
+                  </a:tcPr>
+                </a:tc>
+                <a:tc>
+                  <a:txBody>
+                    <a:bodyPr/>
+                    <a:lstStyle/>
+                    <a:p>
+                      <a:pPr>
+                        <a:defRPr sz="800">
+                          <a:solidFill>
+                            <a:srgbClr val="2C3E50"/>
+                          </a:solidFill>
+                          <a:latin typeface="Calibri"/>
+                        </a:defRPr>
+                      </a:pPr>
+                      <a:r>
+                        <a:t>WA</a:t>
+                      </a:r>
+                    </a:p>
+                  </a:txBody>
+                  <a:tcPr>
+                    <a:solidFill>
+                      <a:srgbClr val="D5F5E3"/>
+                    </a:solidFill>
+                  </a:tcPr>
+                </a:tc>
+              </a:tr>
+              <a:tr h="201168">
+                <a:tc>
+                  <a:txBody>
+                    <a:bodyPr/>
+                    <a:lstStyle/>
+                    <a:p>
+                      <a:pPr>
+                        <a:defRPr sz="800">
+                          <a:solidFill>
+                            <a:srgbClr val="2C3E50"/>
+                          </a:solidFill>
+                          <a:latin typeface="Calibri"/>
+                        </a:defRPr>
+                      </a:pPr>
+                      <a:r>
+                        <a:t>cholesky</a:t>
+                      </a:r>
+                    </a:p>
+                  </a:txBody>
+                  <a:tcPr>
+                    <a:solidFill>
+                      <a:srgbClr val="ECF0F1"/>
+                    </a:solidFill>
+                  </a:tcPr>
+                </a:tc>
+                <a:tc>
+                  <a:txBody>
+                    <a:bodyPr/>
+                    <a:lstStyle/>
+                    <a:p>
+                      <a:pPr>
+                        <a:defRPr sz="800">
+                          <a:solidFill>
+                            <a:srgbClr val="2C3E50"/>
+                          </a:solidFill>
+                          <a:latin typeface="Calibri"/>
+                        </a:defRPr>
+                      </a:pPr>
+                      <a:r>
+                        <a:t>2x</a:t>
+                      </a:r>
+                    </a:p>
+                  </a:txBody>
+                  <a:tcPr>
+                    <a:solidFill>
+                      <a:srgbClr val="ECF0F1"/>
+                    </a:solidFill>
+                  </a:tcPr>
+                </a:tc>
+                <a:tc>
+                  <a:txBody>
+                    <a:bodyPr/>
+                    <a:lstStyle/>
+                    <a:p>
+                      <a:pPr>
+                        <a:defRPr sz="800">
+                          <a:solidFill>
+                            <a:srgbClr val="2C3E50"/>
+                          </a:solidFill>
+                          <a:latin typeface="Calibri"/>
+                        </a:defRPr>
+                      </a:pPr>
+                      <a:r>
+                        <a:t>14.375</a:t>
+                      </a:r>
+                    </a:p>
+                  </a:txBody>
+                  <a:tcPr>
+                    <a:solidFill>
+                      <a:srgbClr val="ECF0F1"/>
+                    </a:solidFill>
+                  </a:tcPr>
+                </a:tc>
+                <a:tc>
+                  <a:txBody>
+                    <a:bodyPr/>
+                    <a:lstStyle/>
+                    <a:p>
+                      <a:pPr>
+                        <a:defRPr sz="800">
+                          <a:solidFill>
+                            <a:srgbClr val="2C3E50"/>
+                          </a:solidFill>
+                          <a:latin typeface="Calibri"/>
+                        </a:defRPr>
+                      </a:pPr>
+                      <a:r>
+                        <a:t>5.047</a:t>
+                      </a:r>
+                    </a:p>
+                  </a:txBody>
+                  <a:tcPr>
+                    <a:solidFill>
+                      <a:srgbClr val="ECF0F1"/>
+                    </a:solidFill>
+                  </a:tcPr>
+                </a:tc>
+                <a:tc>
+                  <a:txBody>
+                    <a:bodyPr/>
+                    <a:lstStyle/>
+                    <a:p>
+                      <a:pPr>
+                        <a:defRPr sz="800">
+                          <a:solidFill>
+                            <a:srgbClr val="2C3E50"/>
+                          </a:solidFill>
+                          <a:latin typeface="Calibri"/>
+                        </a:defRPr>
+                      </a:pPr>
+                      <a:r>
+                        <a:t>2.85x</a:t>
+                      </a:r>
+                    </a:p>
+                  </a:txBody>
+                  <a:tcPr>
+                    <a:solidFill>
+                      <a:srgbClr val="ECF0F1"/>
+                    </a:solidFill>
+                  </a:tcPr>
+                </a:tc>
+                <a:tc>
+                  <a:txBody>
+                    <a:bodyPr/>
+                    <a:lstStyle/>
+                    <a:p>
+                      <a:pPr>
+                        <a:defRPr sz="800">
+                          <a:solidFill>
+                            <a:srgbClr val="2C3E50"/>
+                          </a:solidFill>
+                          <a:latin typeface="Calibri"/>
+                        </a:defRPr>
+                      </a:pPr>
+                      <a:r>
+                        <a:t>NA</a:t>
+                      </a:r>
+                    </a:p>
+                  </a:txBody>
+                  <a:tcPr>
+                    <a:solidFill>
+                      <a:srgbClr val="FADBD8"/>
+                    </a:solidFill>
+                  </a:tcPr>
+                </a:tc>
+              </a:tr>
+              <a:tr h="201168">
+                <a:tc>
+                  <a:txBody>
+                    <a:bodyPr/>
+                    <a:lstStyle/>
+                    <a:p>
+                      <a:pPr>
+                        <a:defRPr sz="800">
+                          <a:solidFill>
+                            <a:srgbClr val="2C3E50"/>
+                          </a:solidFill>
+                          <a:latin typeface="Calibri"/>
+                        </a:defRPr>
+                      </a:pPr>
+                      <a:r>
+                        <a:t>correlation</a:t>
+                      </a:r>
+                    </a:p>
+                  </a:txBody>
+                  <a:tcPr>
+                    <a:solidFill>
+                      <a:srgbClr val="FFFFFF"/>
+                    </a:solidFill>
+                  </a:tcPr>
+                </a:tc>
+                <a:tc>
+                  <a:txBody>
+                    <a:bodyPr/>
+                    <a:lstStyle/>
+                    <a:p>
+                      <a:pPr>
+                        <a:defRPr sz="800">
+                          <a:solidFill>
+                            <a:srgbClr val="2C3E50"/>
+                          </a:solidFill>
+                          <a:latin typeface="Calibri"/>
+                        </a:defRPr>
+                      </a:pPr>
+                      <a:r>
+                        <a:t>8x</a:t>
+                      </a:r>
+                    </a:p>
+                  </a:txBody>
+                  <a:tcPr>
+                    <a:solidFill>
+                      <a:srgbClr val="FFFFFF"/>
+                    </a:solidFill>
+                  </a:tcPr>
+                </a:tc>
+                <a:tc>
+                  <a:txBody>
+                    <a:bodyPr/>
+                    <a:lstStyle/>
+                    <a:p>
+                      <a:pPr>
+                        <a:defRPr sz="800">
+                          <a:solidFill>
+                            <a:srgbClr val="2C3E50"/>
+                          </a:solidFill>
+                          <a:latin typeface="Calibri"/>
+                        </a:defRPr>
+                      </a:pPr>
+                      <a:r>
+                        <a:t>18.238</a:t>
+                      </a:r>
+                    </a:p>
+                  </a:txBody>
+                  <a:tcPr>
+                    <a:solidFill>
+                      <a:srgbClr val="FFFFFF"/>
+                    </a:solidFill>
+                  </a:tcPr>
+                </a:tc>
+                <a:tc>
+                  <a:txBody>
+                    <a:bodyPr/>
+                    <a:lstStyle/>
+                    <a:p>
+                      <a:pPr>
+                        <a:defRPr sz="800">
+                          <a:solidFill>
+                            <a:srgbClr val="2C3E50"/>
+                          </a:solidFill>
+                          <a:latin typeface="Calibri"/>
+                        </a:defRPr>
+                      </a:pPr>
+                      <a:r>
+                        <a:t>19.255</a:t>
+                      </a:r>
+                    </a:p>
+                  </a:txBody>
+                  <a:tcPr>
+                    <a:solidFill>
+                      <a:srgbClr val="FFFFFF"/>
+                    </a:solidFill>
+                  </a:tcPr>
+                </a:tc>
+                <a:tc>
+                  <a:txBody>
+                    <a:bodyPr/>
+                    <a:lstStyle/>
+                    <a:p>
+                      <a:pPr>
+                        <a:defRPr sz="800">
+                          <a:solidFill>
+                            <a:srgbClr val="2C3E50"/>
+                          </a:solidFill>
+                          <a:latin typeface="Calibri"/>
+                        </a:defRPr>
+                      </a:pPr>
+                      <a:r>
+                        <a:t>0.95x</a:t>
+                      </a:r>
+                    </a:p>
+                  </a:txBody>
+                  <a:tcPr>
+                    <a:solidFill>
+                      <a:srgbClr val="FFFFFF"/>
+                    </a:solidFill>
+                  </a:tcPr>
+                </a:tc>
+                <a:tc>
+                  <a:txBody>
+                    <a:bodyPr/>
+                    <a:lstStyle/>
+                    <a:p>
+                      <a:pPr>
+                        <a:defRPr sz="800">
+                          <a:solidFill>
+                            <a:srgbClr val="2C3E50"/>
+                          </a:solidFill>
+                          <a:latin typeface="Calibri"/>
+                        </a:defRPr>
+                      </a:pPr>
+                      <a:r>
+                        <a:t>WA</a:t>
+                      </a:r>
+                    </a:p>
+                  </a:txBody>
+                  <a:tcPr>
+                    <a:solidFill>
+                      <a:srgbClr val="D5F5E3"/>
+                    </a:solidFill>
+                  </a:tcPr>
+                </a:tc>
+              </a:tr>
+              <a:tr h="201168">
+                <a:tc>
+                  <a:txBody>
+                    <a:bodyPr/>
+                    <a:lstStyle/>
+                    <a:p>
+                      <a:pPr>
+                        <a:defRPr sz="800">
+                          <a:solidFill>
+                            <a:srgbClr val="2C3E50"/>
+                          </a:solidFill>
+                          <a:latin typeface="Calibri"/>
+                        </a:defRPr>
+                      </a:pPr>
+                      <a:r>
+                        <a:t>covariance</a:t>
+                      </a:r>
+                    </a:p>
+                  </a:txBody>
+                  <a:tcPr>
+                    <a:solidFill>
+                      <a:srgbClr val="ECF0F1"/>
+                    </a:solidFill>
+                  </a:tcPr>
+                </a:tc>
+                <a:tc>
+                  <a:txBody>
+                    <a:bodyPr/>
+                    <a:lstStyle/>
+                    <a:p>
+                      <a:pPr>
+                        <a:defRPr sz="800">
+                          <a:solidFill>
+                            <a:srgbClr val="2C3E50"/>
+                          </a:solidFill>
+                          <a:latin typeface="Calibri"/>
+                        </a:defRPr>
+                      </a:pPr>
+                      <a:r>
+                        <a:t>8x</a:t>
+                      </a:r>
+                    </a:p>
+                  </a:txBody>
+                  <a:tcPr>
+                    <a:solidFill>
+                      <a:srgbClr val="ECF0F1"/>
+                    </a:solidFill>
+                  </a:tcPr>
+                </a:tc>
+                <a:tc>
+                  <a:txBody>
+                    <a:bodyPr/>
+                    <a:lstStyle/>
+                    <a:p>
+                      <a:pPr>
+                        <a:defRPr sz="800">
+                          <a:solidFill>
+                            <a:srgbClr val="2C3E50"/>
+                          </a:solidFill>
+                          <a:latin typeface="Calibri"/>
+                        </a:defRPr>
+                      </a:pPr>
+                      <a:r>
+                        <a:t>20.268</a:t>
+                      </a:r>
+                    </a:p>
+                  </a:txBody>
+                  <a:tcPr>
+                    <a:solidFill>
+                      <a:srgbClr val="ECF0F1"/>
+                    </a:solidFill>
+                  </a:tcPr>
+                </a:tc>
+                <a:tc>
+                  <a:txBody>
+                    <a:bodyPr/>
+                    <a:lstStyle/>
+                    <a:p>
+                      <a:pPr>
+                        <a:defRPr sz="800">
+                          <a:solidFill>
+                            <a:srgbClr val="2C3E50"/>
+                          </a:solidFill>
+                          <a:latin typeface="Calibri"/>
+                        </a:defRPr>
+                      </a:pPr>
+                      <a:r>
+                        <a:t>timeout (60s</a:t>
+                      </a:r>
+                    </a:p>
+                  </a:txBody>
+                  <a:tcPr>
+                    <a:solidFill>
+                      <a:srgbClr val="ECF0F1"/>
+                    </a:solidFill>
+                  </a:tcPr>
+                </a:tc>
+                <a:tc>
+                  <a:txBody>
+                    <a:bodyPr/>
+                    <a:lstStyle/>
+                    <a:p>
+                      <a:pPr>
+                        <a:defRPr sz="800">
+                          <a:solidFill>
+                            <a:srgbClr val="2C3E50"/>
+                          </a:solidFill>
+                          <a:latin typeface="Calibri"/>
+                        </a:defRPr>
+                      </a:pPr>
+                    </a:p>
+                  </a:txBody>
+                  <a:tcPr>
+                    <a:solidFill>
+                      <a:srgbClr val="ECF0F1"/>
+                    </a:solidFill>
+                  </a:tcPr>
+                </a:tc>
+                <a:tc>
+                  <a:txBody>
+                    <a:bodyPr/>
+                    <a:lstStyle/>
+                    <a:p>
+                      <a:pPr>
+                        <a:defRPr sz="800">
+                          <a:solidFill>
+                            <a:srgbClr val="2C3E50"/>
+                          </a:solidFill>
+                          <a:latin typeface="Calibri"/>
+                        </a:defRPr>
+                      </a:pPr>
+                      <a:r>
+                        <a:t>WA-only</a:t>
+                      </a:r>
+                    </a:p>
+                  </a:txBody>
+                  <a:tcPr>
+                    <a:solidFill>
+                      <a:srgbClr val="ECF0F1"/>
+                    </a:solidFill>
+                  </a:tcPr>
+                </a:tc>
+              </a:tr>
+              <a:tr h="201168">
+                <a:tc>
+                  <a:txBody>
+                    <a:bodyPr/>
+                    <a:lstStyle/>
+                    <a:p>
+                      <a:pPr>
+                        <a:defRPr sz="800">
+                          <a:solidFill>
+                            <a:srgbClr val="2C3E50"/>
+                          </a:solidFill>
+                          <a:latin typeface="Calibri"/>
+                        </a:defRPr>
+                      </a:pPr>
+                      <a:r>
+                        <a:t>deriche</a:t>
+                      </a:r>
+                    </a:p>
+                  </a:txBody>
+                  <a:tcPr>
+                    <a:solidFill>
+                      <a:srgbClr val="FFFFFF"/>
+                    </a:solidFill>
+                  </a:tcPr>
+                </a:tc>
+                <a:tc>
+                  <a:txBody>
+                    <a:bodyPr/>
+                    <a:lstStyle/>
+                    <a:p>
+                      <a:pPr>
+                        <a:defRPr sz="800">
+                          <a:solidFill>
+                            <a:srgbClr val="2C3E50"/>
+                          </a:solidFill>
+                          <a:latin typeface="Calibri"/>
+                        </a:defRPr>
+                      </a:pPr>
+                      <a:r>
+                        <a:t>8x</a:t>
+                      </a:r>
+                    </a:p>
+                  </a:txBody>
+                  <a:tcPr>
+                    <a:solidFill>
+                      <a:srgbClr val="FFFFFF"/>
+                    </a:solidFill>
+                  </a:tcPr>
+                </a:tc>
+                <a:tc>
+                  <a:txBody>
+                    <a:bodyPr/>
+                    <a:lstStyle/>
+                    <a:p>
+                      <a:pPr>
+                        <a:defRPr sz="800">
+                          <a:solidFill>
+                            <a:srgbClr val="2C3E50"/>
+                          </a:solidFill>
+                          <a:latin typeface="Calibri"/>
+                        </a:defRPr>
+                      </a:pPr>
+                      <a:r>
+                        <a:t>867.697</a:t>
+                      </a:r>
+                    </a:p>
+                  </a:txBody>
+                  <a:tcPr>
+                    <a:solidFill>
+                      <a:srgbClr val="FFFFFF"/>
+                    </a:solidFill>
+                  </a:tcPr>
+                </a:tc>
+                <a:tc>
+                  <a:txBody>
+                    <a:bodyPr/>
+                    <a:lstStyle/>
+                    <a:p>
+                      <a:pPr>
+                        <a:defRPr sz="800">
+                          <a:solidFill>
+                            <a:srgbClr val="2C3E50"/>
+                          </a:solidFill>
+                          <a:latin typeface="Calibri"/>
+                        </a:defRPr>
+                      </a:pPr>
+                      <a:r>
+                        <a:t>865.377</a:t>
+                      </a:r>
+                    </a:p>
+                  </a:txBody>
+                  <a:tcPr>
+                    <a:solidFill>
+                      <a:srgbClr val="FFFFFF"/>
+                    </a:solidFill>
+                  </a:tcPr>
+                </a:tc>
+                <a:tc>
+                  <a:txBody>
+                    <a:bodyPr/>
+                    <a:lstStyle/>
+                    <a:p>
+                      <a:pPr>
+                        <a:defRPr sz="800">
+                          <a:solidFill>
+                            <a:srgbClr val="2C3E50"/>
+                          </a:solidFill>
+                          <a:latin typeface="Calibri"/>
+                        </a:defRPr>
+                      </a:pPr>
+                      <a:r>
+                        <a:t>1.00x</a:t>
+                      </a:r>
+                    </a:p>
+                  </a:txBody>
+                  <a:tcPr>
+                    <a:solidFill>
+                      <a:srgbClr val="FFFFFF"/>
+                    </a:solidFill>
+                  </a:tcPr>
+                </a:tc>
+                <a:tc>
+                  <a:txBody>
+                    <a:bodyPr/>
+                    <a:lstStyle/>
+                    <a:p>
+                      <a:pPr>
+                        <a:defRPr sz="800">
+                          <a:solidFill>
+                            <a:srgbClr val="2C3E50"/>
+                          </a:solidFill>
+                          <a:latin typeface="Calibri"/>
+                        </a:defRPr>
+                      </a:pPr>
+                      <a:r>
+                        <a:t>TIE</a:t>
+                      </a:r>
+                    </a:p>
+                  </a:txBody>
+                  <a:tcPr>
+                    <a:solidFill>
+                      <a:srgbClr val="FFFFFF"/>
+                    </a:solidFill>
+                  </a:tcPr>
+                </a:tc>
+              </a:tr>
+              <a:tr h="201168">
+                <a:tc>
+                  <a:txBody>
+                    <a:bodyPr/>
+                    <a:lstStyle/>
+                    <a:p>
+                      <a:pPr>
+                        <a:defRPr sz="800">
+                          <a:solidFill>
+                            <a:srgbClr val="2C3E50"/>
+                          </a:solidFill>
+                          <a:latin typeface="Calibri"/>
+                        </a:defRPr>
+                      </a:pPr>
+                      <a:r>
+                        <a:t>doitgen</a:t>
+                      </a:r>
+                    </a:p>
+                  </a:txBody>
+                  <a:tcPr>
+                    <a:solidFill>
+                      <a:srgbClr val="ECF0F1"/>
+                    </a:solidFill>
+                  </a:tcPr>
+                </a:tc>
+                <a:tc>
+                  <a:txBody>
+                    <a:bodyPr/>
+                    <a:lstStyle/>
+                    <a:p>
+                      <a:pPr>
+                        <a:defRPr sz="800">
+                          <a:solidFill>
+                            <a:srgbClr val="2C3E50"/>
+                          </a:solidFill>
+                          <a:latin typeface="Calibri"/>
+                        </a:defRPr>
+                      </a:pPr>
+                      <a:r>
+                        <a:t>8x</a:t>
+                      </a:r>
+                    </a:p>
+                  </a:txBody>
+                  <a:tcPr>
+                    <a:solidFill>
+                      <a:srgbClr val="ECF0F1"/>
+                    </a:solidFill>
+                  </a:tcPr>
+                </a:tc>
+                <a:tc>
+                  <a:txBody>
+                    <a:bodyPr/>
+                    <a:lstStyle/>
+                    <a:p>
+                      <a:pPr>
+                        <a:defRPr sz="800">
+                          <a:solidFill>
+                            <a:srgbClr val="2C3E50"/>
+                          </a:solidFill>
+                          <a:latin typeface="Calibri"/>
+                        </a:defRPr>
+                      </a:pPr>
+                      <a:r>
+                        <a:t>1.221</a:t>
+                      </a:r>
+                    </a:p>
+                  </a:txBody>
+                  <a:tcPr>
+                    <a:solidFill>
+                      <a:srgbClr val="ECF0F1"/>
+                    </a:solidFill>
+                  </a:tcPr>
+                </a:tc>
+                <a:tc>
+                  <a:txBody>
+                    <a:bodyPr/>
+                    <a:lstStyle/>
+                    <a:p>
+                      <a:pPr>
+                        <a:defRPr sz="800">
+                          <a:solidFill>
+                            <a:srgbClr val="2C3E50"/>
+                          </a:solidFill>
+                          <a:latin typeface="Calibri"/>
+                        </a:defRPr>
+                      </a:pPr>
+                      <a:r>
+                        <a:t>6.696</a:t>
+                      </a:r>
+                    </a:p>
+                  </a:txBody>
+                  <a:tcPr>
+                    <a:solidFill>
+                      <a:srgbClr val="ECF0F1"/>
+                    </a:solidFill>
+                  </a:tcPr>
+                </a:tc>
+                <a:tc>
+                  <a:txBody>
+                    <a:bodyPr/>
+                    <a:lstStyle/>
+                    <a:p>
+                      <a:pPr>
+                        <a:defRPr sz="800">
+                          <a:solidFill>
+                            <a:srgbClr val="2C3E50"/>
+                          </a:solidFill>
+                          <a:latin typeface="Calibri"/>
+                        </a:defRPr>
+                      </a:pPr>
+                      <a:r>
+                        <a:t>0.18x</a:t>
+                      </a:r>
+                    </a:p>
+                  </a:txBody>
+                  <a:tcPr>
+                    <a:solidFill>
+                      <a:srgbClr val="ECF0F1"/>
+                    </a:solidFill>
+                  </a:tcPr>
+                </a:tc>
+                <a:tc>
+                  <a:txBody>
+                    <a:bodyPr/>
+                    <a:lstStyle/>
+                    <a:p>
+                      <a:pPr>
+                        <a:defRPr sz="800">
+                          <a:solidFill>
+                            <a:srgbClr val="2C3E50"/>
+                          </a:solidFill>
+                          <a:latin typeface="Calibri"/>
+                        </a:defRPr>
+                      </a:pPr>
+                      <a:r>
+                        <a:t>WA</a:t>
+                      </a:r>
+                    </a:p>
+                  </a:txBody>
+                  <a:tcPr>
+                    <a:solidFill>
+                      <a:srgbClr val="D5F5E3"/>
+                    </a:solidFill>
+                  </a:tcPr>
+                </a:tc>
+              </a:tr>
+              <a:tr h="201168">
+                <a:tc>
+                  <a:txBody>
+                    <a:bodyPr/>
+                    <a:lstStyle/>
+                    <a:p>
+                      <a:pPr>
+                        <a:defRPr sz="800">
+                          <a:solidFill>
+                            <a:srgbClr val="2C3E50"/>
+                          </a:solidFill>
+                          <a:latin typeface="Calibri"/>
+                        </a:defRPr>
+                      </a:pPr>
+                      <a:r>
+                        <a:t>durbin</a:t>
+                      </a:r>
+                    </a:p>
+                  </a:txBody>
+                  <a:tcPr>
+                    <a:solidFill>
+                      <a:srgbClr val="FFFFFF"/>
+                    </a:solidFill>
+                  </a:tcPr>
+                </a:tc>
+                <a:tc>
+                  <a:txBody>
+                    <a:bodyPr/>
+                    <a:lstStyle/>
+                    <a:p>
+                      <a:pPr>
+                        <a:defRPr sz="800">
+                          <a:solidFill>
+                            <a:srgbClr val="2C3E50"/>
+                          </a:solidFill>
+                          <a:latin typeface="Calibri"/>
+                        </a:defRPr>
+                      </a:pPr>
+                      <a:r>
+                        <a:t>2x</a:t>
+                      </a:r>
+                    </a:p>
+                  </a:txBody>
+                  <a:tcPr>
+                    <a:solidFill>
+                      <a:srgbClr val="FFFFFF"/>
+                    </a:solidFill>
+                  </a:tcPr>
+                </a:tc>
+                <a:tc>
+                  <a:txBody>
+                    <a:bodyPr/>
+                    <a:lstStyle/>
+                    <a:p>
+                      <a:pPr>
+                        <a:defRPr sz="800">
+                          <a:solidFill>
+                            <a:srgbClr val="2C3E50"/>
+                          </a:solidFill>
+                          <a:latin typeface="Calibri"/>
+                        </a:defRPr>
+                      </a:pPr>
+                      <a:r>
+                        <a:t>1.727</a:t>
+                      </a:r>
+                    </a:p>
+                  </a:txBody>
+                  <a:tcPr>
+                    <a:solidFill>
+                      <a:srgbClr val="FFFFFF"/>
+                    </a:solidFill>
+                  </a:tcPr>
+                </a:tc>
+                <a:tc>
+                  <a:txBody>
+                    <a:bodyPr/>
+                    <a:lstStyle/>
+                    <a:p>
+                      <a:pPr>
+                        <a:defRPr sz="800">
+                          <a:solidFill>
+                            <a:srgbClr val="2C3E50"/>
+                          </a:solidFill>
+                          <a:latin typeface="Calibri"/>
+                        </a:defRPr>
+                      </a:pPr>
+                      <a:r>
+                        <a:t>1.686</a:t>
+                      </a:r>
+                    </a:p>
+                  </a:txBody>
+                  <a:tcPr>
+                    <a:solidFill>
+                      <a:srgbClr val="FFFFFF"/>
+                    </a:solidFill>
+                  </a:tcPr>
+                </a:tc>
+                <a:tc>
+                  <a:txBody>
+                    <a:bodyPr/>
+                    <a:lstStyle/>
+                    <a:p>
+                      <a:pPr>
+                        <a:defRPr sz="800">
+                          <a:solidFill>
+                            <a:srgbClr val="2C3E50"/>
+                          </a:solidFill>
+                          <a:latin typeface="Calibri"/>
+                        </a:defRPr>
+                      </a:pPr>
+                      <a:r>
+                        <a:t>1.02x</a:t>
+                      </a:r>
+                    </a:p>
+                  </a:txBody>
+                  <a:tcPr>
+                    <a:solidFill>
+                      <a:srgbClr val="FFFFFF"/>
+                    </a:solidFill>
+                  </a:tcPr>
+                </a:tc>
+                <a:tc>
+                  <a:txBody>
+                    <a:bodyPr/>
+                    <a:lstStyle/>
+                    <a:p>
+                      <a:pPr>
+                        <a:defRPr sz="800">
+                          <a:solidFill>
+                            <a:srgbClr val="2C3E50"/>
+                          </a:solidFill>
+                          <a:latin typeface="Calibri"/>
+                        </a:defRPr>
+                      </a:pPr>
+                      <a:r>
+                        <a:t>TIE</a:t>
+                      </a:r>
+                    </a:p>
+                  </a:txBody>
+                  <a:tcPr>
+                    <a:solidFill>
+                      <a:srgbClr val="FFFFFF"/>
+                    </a:solidFill>
+                  </a:tcPr>
+                </a:tc>
+              </a:tr>
+              <a:tr h="201168">
+                <a:tc>
+                  <a:txBody>
+                    <a:bodyPr/>
+                    <a:lstStyle/>
+                    <a:p>
+                      <a:pPr>
+                        <a:defRPr sz="800">
+                          <a:solidFill>
+                            <a:srgbClr val="2C3E50"/>
+                          </a:solidFill>
+                          <a:latin typeface="Calibri"/>
+                        </a:defRPr>
+                      </a:pPr>
+                      <a:r>
+                        <a:t>fdtd_2d</a:t>
+                      </a:r>
+                    </a:p>
+                  </a:txBody>
+                  <a:tcPr>
+                    <a:solidFill>
+                      <a:srgbClr val="ECF0F1"/>
+                    </a:solidFill>
+                  </a:tcPr>
+                </a:tc>
+                <a:tc>
+                  <a:txBody>
+                    <a:bodyPr/>
+                    <a:lstStyle/>
+                    <a:p>
+                      <a:pPr>
+                        <a:defRPr sz="800">
+                          <a:solidFill>
+                            <a:srgbClr val="2C3E50"/>
+                          </a:solidFill>
+                          <a:latin typeface="Calibri"/>
+                        </a:defRPr>
+                      </a:pPr>
+                      <a:r>
+                        <a:t>8x</a:t>
+                      </a:r>
+                    </a:p>
+                  </a:txBody>
+                  <a:tcPr>
+                    <a:solidFill>
+                      <a:srgbClr val="ECF0F1"/>
+                    </a:solidFill>
+                  </a:tcPr>
+                </a:tc>
+                <a:tc>
+                  <a:txBody>
+                    <a:bodyPr/>
+                    <a:lstStyle/>
+                    <a:p>
+                      <a:pPr>
+                        <a:defRPr sz="800">
+                          <a:solidFill>
+                            <a:srgbClr val="2C3E50"/>
+                          </a:solidFill>
+                          <a:latin typeface="Calibri"/>
+                        </a:defRPr>
+                      </a:pPr>
+                      <a:r>
+                        <a:t>17.776</a:t>
+                      </a:r>
+                    </a:p>
+                  </a:txBody>
+                  <a:tcPr>
+                    <a:solidFill>
+                      <a:srgbClr val="ECF0F1"/>
+                    </a:solidFill>
+                  </a:tcPr>
+                </a:tc>
+                <a:tc>
+                  <a:txBody>
+                    <a:bodyPr/>
+                    <a:lstStyle/>
+                    <a:p>
+                      <a:pPr>
+                        <a:defRPr sz="800">
+                          <a:solidFill>
+                            <a:srgbClr val="2C3E50"/>
+                          </a:solidFill>
+                          <a:latin typeface="Calibri"/>
+                        </a:defRPr>
+                      </a:pPr>
+                      <a:r>
+                        <a:t>1006.828</a:t>
+                      </a:r>
+                    </a:p>
+                  </a:txBody>
+                  <a:tcPr>
+                    <a:solidFill>
+                      <a:srgbClr val="ECF0F1"/>
+                    </a:solidFill>
+                  </a:tcPr>
+                </a:tc>
+                <a:tc>
+                  <a:txBody>
+                    <a:bodyPr/>
+                    <a:lstStyle/>
+                    <a:p>
+                      <a:pPr>
+                        <a:defRPr sz="800">
+                          <a:solidFill>
+                            <a:srgbClr val="2C3E50"/>
+                          </a:solidFill>
+                          <a:latin typeface="Calibri"/>
+                        </a:defRPr>
+                      </a:pPr>
+                      <a:r>
+                        <a:t>0.02x</a:t>
+                      </a:r>
+                    </a:p>
+                  </a:txBody>
+                  <a:tcPr>
+                    <a:solidFill>
+                      <a:srgbClr val="ECF0F1"/>
+                    </a:solidFill>
+                  </a:tcPr>
+                </a:tc>
+                <a:tc>
+                  <a:txBody>
+                    <a:bodyPr/>
+                    <a:lstStyle/>
+                    <a:p>
+                      <a:pPr>
+                        <a:defRPr sz="800">
+                          <a:solidFill>
+                            <a:srgbClr val="2C3E50"/>
+                          </a:solidFill>
+                          <a:latin typeface="Calibri"/>
+                        </a:defRPr>
+                      </a:pPr>
+                      <a:r>
+                        <a:t>WA</a:t>
+                      </a:r>
+                    </a:p>
+                  </a:txBody>
+                  <a:tcPr>
+                    <a:solidFill>
+                      <a:srgbClr val="D5F5E3"/>
+                    </a:solidFill>
+                  </a:tcPr>
+                </a:tc>
+              </a:tr>
+              <a:tr h="201168">
+                <a:tc>
+                  <a:txBody>
+                    <a:bodyPr/>
+                    <a:lstStyle/>
+                    <a:p>
+                      <a:pPr>
+                        <a:defRPr sz="800">
+                          <a:solidFill>
+                            <a:srgbClr val="2C3E50"/>
+                          </a:solidFill>
+                          <a:latin typeface="Calibri"/>
+                        </a:defRPr>
+                      </a:pPr>
+                      <a:r>
+                        <a:t>floyd_warshall</a:t>
+                      </a:r>
+                    </a:p>
+                  </a:txBody>
+                  <a:tcPr>
+                    <a:solidFill>
+                      <a:srgbClr val="FFFFFF"/>
+                    </a:solidFill>
+                  </a:tcPr>
+                </a:tc>
+                <a:tc>
+                  <a:txBody>
+                    <a:bodyPr/>
+                    <a:lstStyle/>
+                    <a:p>
+                      <a:pPr>
+                        <a:defRPr sz="800">
+                          <a:solidFill>
+                            <a:srgbClr val="2C3E50"/>
+                          </a:solidFill>
+                          <a:latin typeface="Calibri"/>
+                        </a:defRPr>
+                      </a:pPr>
+                      <a:r>
+                        <a:t>2x</a:t>
+                      </a:r>
+                    </a:p>
+                  </a:txBody>
+                  <a:tcPr>
+                    <a:solidFill>
+                      <a:srgbClr val="FFFFFF"/>
+                    </a:solidFill>
+                  </a:tcPr>
+                </a:tc>
+                <a:tc>
+                  <a:txBody>
+                    <a:bodyPr/>
+                    <a:lstStyle/>
+                    <a:p>
+                      <a:pPr>
+                        <a:defRPr sz="800">
+                          <a:solidFill>
+                            <a:srgbClr val="2C3E50"/>
+                          </a:solidFill>
+                          <a:latin typeface="Calibri"/>
+                        </a:defRPr>
+                      </a:pPr>
+                      <a:r>
+                        <a:t>2.589</a:t>
+                      </a:r>
+                    </a:p>
+                  </a:txBody>
+                  <a:tcPr>
+                    <a:solidFill>
+                      <a:srgbClr val="FFFFFF"/>
+                    </a:solidFill>
+                  </a:tcPr>
+                </a:tc>
+                <a:tc>
+                  <a:txBody>
+                    <a:bodyPr/>
+                    <a:lstStyle/>
+                    <a:p>
+                      <a:pPr>
+                        <a:defRPr sz="800">
+                          <a:solidFill>
+                            <a:srgbClr val="2C3E50"/>
+                          </a:solidFill>
+                          <a:latin typeface="Calibri"/>
+                        </a:defRPr>
+                      </a:pPr>
+                      <a:r>
+                        <a:t>2.605</a:t>
+                      </a:r>
+                    </a:p>
+                  </a:txBody>
+                  <a:tcPr>
+                    <a:solidFill>
+                      <a:srgbClr val="FFFFFF"/>
+                    </a:solidFill>
+                  </a:tcPr>
+                </a:tc>
+                <a:tc>
+                  <a:txBody>
+                    <a:bodyPr/>
+                    <a:lstStyle/>
+                    <a:p>
+                      <a:pPr>
+                        <a:defRPr sz="800">
+                          <a:solidFill>
+                            <a:srgbClr val="2C3E50"/>
+                          </a:solidFill>
+                          <a:latin typeface="Calibri"/>
+                        </a:defRPr>
+                      </a:pPr>
+                      <a:r>
+                        <a:t>0.99x</a:t>
+                      </a:r>
+                    </a:p>
+                  </a:txBody>
+                  <a:tcPr>
+                    <a:solidFill>
+                      <a:srgbClr val="FFFFFF"/>
+                    </a:solidFill>
+                  </a:tcPr>
+                </a:tc>
+                <a:tc>
+                  <a:txBody>
+                    <a:bodyPr/>
+                    <a:lstStyle/>
+                    <a:p>
+                      <a:pPr>
+                        <a:defRPr sz="800">
+                          <a:solidFill>
+                            <a:srgbClr val="2C3E50"/>
+                          </a:solidFill>
+                          <a:latin typeface="Calibri"/>
+                        </a:defRPr>
+                      </a:pPr>
+                      <a:r>
+                        <a:t>TIE</a:t>
+                      </a:r>
+                    </a:p>
+                  </a:txBody>
+                  <a:tcPr>
+                    <a:solidFill>
+                      <a:srgbClr val="FFFFFF"/>
+                    </a:solidFill>
+                  </a:tcPr>
+                </a:tc>
+              </a:tr>
+              <a:tr h="201168">
+                <a:tc>
+                  <a:txBody>
+                    <a:bodyPr/>
+                    <a:lstStyle/>
+                    <a:p>
+                      <a:pPr>
+                        <a:defRPr sz="800">
+                          <a:solidFill>
+                            <a:srgbClr val="2C3E50"/>
+                          </a:solidFill>
+                          <a:latin typeface="Calibri"/>
+                        </a:defRPr>
+                      </a:pPr>
+                      <a:r>
+                        <a:t>gemm</a:t>
+                      </a:r>
+                    </a:p>
+                  </a:txBody>
+                  <a:tcPr>
+                    <a:solidFill>
+                      <a:srgbClr val="ECF0F1"/>
+                    </a:solidFill>
+                  </a:tcPr>
+                </a:tc>
+                <a:tc>
+                  <a:txBody>
+                    <a:bodyPr/>
+                    <a:lstStyle/>
+                    <a:p>
+                      <a:pPr>
+                        <a:defRPr sz="800">
+                          <a:solidFill>
+                            <a:srgbClr val="2C3E50"/>
+                          </a:solidFill>
+                          <a:latin typeface="Calibri"/>
+                        </a:defRPr>
+                      </a:pPr>
+                      <a:r>
+                        <a:t>8x</a:t>
+                      </a:r>
+                    </a:p>
+                  </a:txBody>
+                  <a:tcPr>
+                    <a:solidFill>
+                      <a:srgbClr val="ECF0F1"/>
+                    </a:solidFill>
+                  </a:tcPr>
+                </a:tc>
+                <a:tc>
+                  <a:txBody>
+                    <a:bodyPr/>
+                    <a:lstStyle/>
+                    <a:p>
+                      <a:pPr>
+                        <a:defRPr sz="800">
+                          <a:solidFill>
+                            <a:srgbClr val="2C3E50"/>
+                          </a:solidFill>
+                          <a:latin typeface="Calibri"/>
+                        </a:defRPr>
+                      </a:pPr>
+                      <a:r>
+                        <a:t>0.192</a:t>
+                      </a:r>
+                    </a:p>
+                  </a:txBody>
+                  <a:tcPr>
+                    <a:solidFill>
+                      <a:srgbClr val="ECF0F1"/>
+                    </a:solidFill>
+                  </a:tcPr>
+                </a:tc>
+                <a:tc>
+                  <a:txBody>
+                    <a:bodyPr/>
+                    <a:lstStyle/>
+                    <a:p>
+                      <a:pPr>
+                        <a:defRPr sz="800">
+                          <a:solidFill>
+                            <a:srgbClr val="2C3E50"/>
+                          </a:solidFill>
+                          <a:latin typeface="Calibri"/>
+                        </a:defRPr>
+                      </a:pPr>
+                      <a:r>
+                        <a:t>0.802</a:t>
+                      </a:r>
+                    </a:p>
+                  </a:txBody>
+                  <a:tcPr>
+                    <a:solidFill>
+                      <a:srgbClr val="ECF0F1"/>
+                    </a:solidFill>
+                  </a:tcPr>
+                </a:tc>
+                <a:tc>
+                  <a:txBody>
+                    <a:bodyPr/>
+                    <a:lstStyle/>
+                    <a:p>
+                      <a:pPr>
+                        <a:defRPr sz="800">
+                          <a:solidFill>
+                            <a:srgbClr val="2C3E50"/>
+                          </a:solidFill>
+                          <a:latin typeface="Calibri"/>
+                        </a:defRPr>
+                      </a:pPr>
+                      <a:r>
+                        <a:t>0.24x</a:t>
+                      </a:r>
+                    </a:p>
+                  </a:txBody>
+                  <a:tcPr>
+                    <a:solidFill>
+                      <a:srgbClr val="ECF0F1"/>
+                    </a:solidFill>
+                  </a:tcPr>
+                </a:tc>
+                <a:tc>
+                  <a:txBody>
+                    <a:bodyPr/>
+                    <a:lstStyle/>
+                    <a:p>
+                      <a:pPr>
+                        <a:defRPr sz="800">
+                          <a:solidFill>
+                            <a:srgbClr val="2C3E50"/>
+                          </a:solidFill>
+                          <a:latin typeface="Calibri"/>
+                        </a:defRPr>
+                      </a:pPr>
+                      <a:r>
+                        <a:t>WA</a:t>
+                      </a:r>
+                    </a:p>
+                  </a:txBody>
+                  <a:tcPr>
+                    <a:solidFill>
+                      <a:srgbClr val="D5F5E3"/>
+                    </a:solidFill>
+                  </a:tcPr>
+                </a:tc>
+              </a:tr>
+              <a:tr h="201168">
+                <a:tc>
+                  <a:txBody>
+                    <a:bodyPr/>
+                    <a:lstStyle/>
+                    <a:p>
+                      <a:pPr>
+                        <a:defRPr sz="800">
+                          <a:solidFill>
+                            <a:srgbClr val="2C3E50"/>
+                          </a:solidFill>
+                          <a:latin typeface="Calibri"/>
+                        </a:defRPr>
+                      </a:pPr>
+                      <a:r>
+                        <a:t>gemver</a:t>
+                      </a:r>
+                    </a:p>
+                  </a:txBody>
+                  <a:tcPr>
+                    <a:solidFill>
+                      <a:srgbClr val="FFFFFF"/>
+                    </a:solidFill>
+                  </a:tcPr>
+                </a:tc>
+                <a:tc>
+                  <a:txBody>
+                    <a:bodyPr/>
+                    <a:lstStyle/>
+                    <a:p>
+                      <a:pPr>
+                        <a:defRPr sz="800">
+                          <a:solidFill>
+                            <a:srgbClr val="2C3E50"/>
+                          </a:solidFill>
+                          <a:latin typeface="Calibri"/>
+                        </a:defRPr>
+                      </a:pPr>
+                      <a:r>
+                        <a:t>8x</a:t>
+                      </a:r>
+                    </a:p>
+                  </a:txBody>
+                  <a:tcPr>
+                    <a:solidFill>
+                      <a:srgbClr val="FFFFFF"/>
+                    </a:solidFill>
+                  </a:tcPr>
+                </a:tc>
+                <a:tc>
+                  <a:txBody>
+                    <a:bodyPr/>
+                    <a:lstStyle/>
+                    <a:p>
+                      <a:pPr>
+                        <a:defRPr sz="800">
+                          <a:solidFill>
+                            <a:srgbClr val="2C3E50"/>
+                          </a:solidFill>
+                          <a:latin typeface="Calibri"/>
+                        </a:defRPr>
+                      </a:pPr>
+                      <a:r>
+                        <a:t>0.057</a:t>
+                      </a:r>
+                    </a:p>
+                  </a:txBody>
+                  <a:tcPr>
+                    <a:solidFill>
+                      <a:srgbClr val="FFFFFF"/>
+                    </a:solidFill>
+                  </a:tcPr>
+                </a:tc>
+                <a:tc>
+                  <a:txBody>
+                    <a:bodyPr/>
+                    <a:lstStyle/>
+                    <a:p>
+                      <a:pPr>
+                        <a:defRPr sz="800">
+                          <a:solidFill>
+                            <a:srgbClr val="2C3E50"/>
+                          </a:solidFill>
+                          <a:latin typeface="Calibri"/>
+                        </a:defRPr>
+                      </a:pPr>
+                      <a:r>
+                        <a:t>0.049</a:t>
+                      </a:r>
+                    </a:p>
+                  </a:txBody>
+                  <a:tcPr>
+                    <a:solidFill>
+                      <a:srgbClr val="FFFFFF"/>
+                    </a:solidFill>
+                  </a:tcPr>
+                </a:tc>
+                <a:tc>
+                  <a:txBody>
+                    <a:bodyPr/>
+                    <a:lstStyle/>
+                    <a:p>
+                      <a:pPr>
+                        <a:defRPr sz="800">
+                          <a:solidFill>
+                            <a:srgbClr val="2C3E50"/>
+                          </a:solidFill>
+                          <a:latin typeface="Calibri"/>
+                        </a:defRPr>
+                      </a:pPr>
+                      <a:r>
+                        <a:t>1.16x</a:t>
+                      </a:r>
+                    </a:p>
+                  </a:txBody>
+                  <a:tcPr>
+                    <a:solidFill>
+                      <a:srgbClr val="FFFFFF"/>
+                    </a:solidFill>
+                  </a:tcPr>
+                </a:tc>
+                <a:tc>
+                  <a:txBody>
+                    <a:bodyPr/>
+                    <a:lstStyle/>
+                    <a:p>
+                      <a:pPr>
+                        <a:defRPr sz="800">
+                          <a:solidFill>
+                            <a:srgbClr val="2C3E50"/>
+                          </a:solidFill>
+                          <a:latin typeface="Calibri"/>
+                        </a:defRPr>
+                      </a:pPr>
+                      <a:r>
+                        <a:t>NA</a:t>
+                      </a:r>
+                    </a:p>
+                  </a:txBody>
+                  <a:tcPr>
+                    <a:solidFill>
+                      <a:srgbClr val="FADBD8"/>
+                    </a:solidFill>
+                  </a:tcPr>
+                </a:tc>
+              </a:tr>
+              <a:tr h="201168">
+                <a:tc>
+                  <a:txBody>
+                    <a:bodyPr/>
+                    <a:lstStyle/>
+                    <a:p>
+                      <a:pPr>
+                        <a:defRPr sz="800">
+                          <a:solidFill>
+                            <a:srgbClr val="2C3E50"/>
+                          </a:solidFill>
+                          <a:latin typeface="Calibri"/>
+                        </a:defRPr>
+                      </a:pPr>
+                      <a:r>
+                        <a:t>gesummv</a:t>
+                      </a:r>
+                    </a:p>
+                  </a:txBody>
+                  <a:tcPr>
+                    <a:solidFill>
+                      <a:srgbClr val="ECF0F1"/>
+                    </a:solidFill>
+                  </a:tcPr>
+                </a:tc>
+                <a:tc>
+                  <a:txBody>
+                    <a:bodyPr/>
+                    <a:lstStyle/>
+                    <a:p>
+                      <a:pPr>
+                        <a:defRPr sz="800">
+                          <a:solidFill>
+                            <a:srgbClr val="2C3E50"/>
+                          </a:solidFill>
+                          <a:latin typeface="Calibri"/>
+                        </a:defRPr>
+                      </a:pPr>
+                      <a:r>
+                        <a:t>8x</a:t>
+                      </a:r>
+                    </a:p>
+                  </a:txBody>
+                  <a:tcPr>
+                    <a:solidFill>
+                      <a:srgbClr val="ECF0F1"/>
+                    </a:solidFill>
+                  </a:tcPr>
+                </a:tc>
+                <a:tc>
+                  <a:txBody>
+                    <a:bodyPr/>
+                    <a:lstStyle/>
+                    <a:p>
+                      <a:pPr>
+                        <a:defRPr sz="800">
+                          <a:solidFill>
+                            <a:srgbClr val="2C3E50"/>
+                          </a:solidFill>
+                          <a:latin typeface="Calibri"/>
+                        </a:defRPr>
+                      </a:pPr>
+                      <a:r>
+                        <a:t>0.017</a:t>
+                      </a:r>
+                    </a:p>
+                  </a:txBody>
+                  <a:tcPr>
+                    <a:solidFill>
+                      <a:srgbClr val="ECF0F1"/>
+                    </a:solidFill>
+                  </a:tcPr>
+                </a:tc>
+                <a:tc>
+                  <a:txBody>
+                    <a:bodyPr/>
+                    <a:lstStyle/>
+                    <a:p>
+                      <a:pPr>
+                        <a:defRPr sz="800">
+                          <a:solidFill>
+                            <a:srgbClr val="2C3E50"/>
+                          </a:solidFill>
+                          <a:latin typeface="Calibri"/>
+                        </a:defRPr>
+                      </a:pPr>
+                      <a:r>
+                        <a:t>0.080</a:t>
+                      </a:r>
+                    </a:p>
+                  </a:txBody>
+                  <a:tcPr>
+                    <a:solidFill>
+                      <a:srgbClr val="ECF0F1"/>
+                    </a:solidFill>
+                  </a:tcPr>
+                </a:tc>
+                <a:tc>
+                  <a:txBody>
+                    <a:bodyPr/>
+                    <a:lstStyle/>
+                    <a:p>
+                      <a:pPr>
+                        <a:defRPr sz="800">
+                          <a:solidFill>
+                            <a:srgbClr val="2C3E50"/>
+                          </a:solidFill>
+                          <a:latin typeface="Calibri"/>
+                        </a:defRPr>
+                      </a:pPr>
+                      <a:r>
+                        <a:t>0.21x</a:t>
+                      </a:r>
+                    </a:p>
+                  </a:txBody>
+                  <a:tcPr>
+                    <a:solidFill>
+                      <a:srgbClr val="ECF0F1"/>
+                    </a:solidFill>
+                  </a:tcPr>
+                </a:tc>
+                <a:tc>
+                  <a:txBody>
+                    <a:bodyPr/>
+                    <a:lstStyle/>
+                    <a:p>
+                      <a:pPr>
+                        <a:defRPr sz="800">
+                          <a:solidFill>
+                            <a:srgbClr val="2C3E50"/>
+                          </a:solidFill>
+                          <a:latin typeface="Calibri"/>
+                        </a:defRPr>
+                      </a:pPr>
+                      <a:r>
+                        <a:t>WA</a:t>
+                      </a:r>
+                    </a:p>
+                  </a:txBody>
+                  <a:tcPr>
+                    <a:solidFill>
+                      <a:srgbClr val="D5F5E3"/>
+                    </a:solidFill>
+                  </a:tcPr>
+                </a:tc>
+              </a:tr>
+              <a:tr h="201168">
+                <a:tc>
+                  <a:txBody>
+                    <a:bodyPr/>
+                    <a:lstStyle/>
+                    <a:p>
+                      <a:pPr>
+                        <a:defRPr sz="800">
+                          <a:solidFill>
+                            <a:srgbClr val="2C3E50"/>
+                          </a:solidFill>
+                          <a:latin typeface="Calibri"/>
+                        </a:defRPr>
+                      </a:pPr>
+                      <a:r>
+                        <a:t>gramschmidt</a:t>
+                      </a:r>
+                    </a:p>
+                  </a:txBody>
+                  <a:tcPr>
+                    <a:solidFill>
+                      <a:srgbClr val="FFFFFF"/>
+                    </a:solidFill>
+                  </a:tcPr>
+                </a:tc>
+                <a:tc>
+                  <a:txBody>
+                    <a:bodyPr/>
+                    <a:lstStyle/>
+                    <a:p>
+                      <a:pPr>
+                        <a:defRPr sz="800">
+                          <a:solidFill>
+                            <a:srgbClr val="2C3E50"/>
+                          </a:solidFill>
+                          <a:latin typeface="Calibri"/>
+                        </a:defRPr>
+                      </a:pPr>
+                      <a:r>
+                        <a:t>8x</a:t>
+                      </a:r>
+                    </a:p>
+                  </a:txBody>
+                  <a:tcPr>
+                    <a:solidFill>
+                      <a:srgbClr val="FFFFFF"/>
+                    </a:solidFill>
+                  </a:tcPr>
+                </a:tc>
+                <a:tc>
+                  <a:txBody>
+                    <a:bodyPr/>
+                    <a:lstStyle/>
+                    <a:p>
+                      <a:pPr>
+                        <a:defRPr sz="800">
+                          <a:solidFill>
+                            <a:srgbClr val="2C3E50"/>
+                          </a:solidFill>
+                          <a:latin typeface="Calibri"/>
+                        </a:defRPr>
+                      </a:pPr>
+                      <a:r>
+                        <a:t>1092.565</a:t>
+                      </a:r>
+                    </a:p>
+                  </a:txBody>
+                  <a:tcPr>
+                    <a:solidFill>
+                      <a:srgbClr val="FFFFFF"/>
+                    </a:solidFill>
+                  </a:tcPr>
+                </a:tc>
+                <a:tc>
+                  <a:txBody>
+                    <a:bodyPr/>
+                    <a:lstStyle/>
+                    <a:p>
+                      <a:pPr>
+                        <a:defRPr sz="800">
+                          <a:solidFill>
+                            <a:srgbClr val="2C3E50"/>
+                          </a:solidFill>
+                          <a:latin typeface="Calibri"/>
+                        </a:defRPr>
+                      </a:pPr>
+                      <a:r>
+                        <a:t>timeout (60s</a:t>
+                      </a:r>
+                    </a:p>
+                  </a:txBody>
+                  <a:tcPr>
+                    <a:solidFill>
+                      <a:srgbClr val="FFFFFF"/>
+                    </a:solidFill>
+                  </a:tcPr>
+                </a:tc>
+                <a:tc>
+                  <a:txBody>
+                    <a:bodyPr/>
+                    <a:lstStyle/>
+                    <a:p>
+                      <a:pPr>
+                        <a:defRPr sz="800">
+                          <a:solidFill>
+                            <a:srgbClr val="2C3E50"/>
+                          </a:solidFill>
+                          <a:latin typeface="Calibri"/>
+                        </a:defRPr>
+                      </a:pPr>
+                    </a:p>
+                  </a:txBody>
+                  <a:tcPr>
+                    <a:solidFill>
+                      <a:srgbClr val="FFFFFF"/>
+                    </a:solidFill>
+                  </a:tcPr>
+                </a:tc>
+                <a:tc>
+                  <a:txBody>
+                    <a:bodyPr/>
+                    <a:lstStyle/>
+                    <a:p>
+                      <a:pPr>
+                        <a:defRPr sz="800">
+                          <a:solidFill>
+                            <a:srgbClr val="2C3E50"/>
+                          </a:solidFill>
+                          <a:latin typeface="Calibri"/>
+                        </a:defRPr>
+                      </a:pPr>
+                      <a:r>
+                        <a:t>WA-only</a:t>
+                      </a:r>
+                    </a:p>
+                  </a:txBody>
+                  <a:tcPr>
+                    <a:solidFill>
+                      <a:srgbClr val="FFFFFF"/>
+                    </a:solidFill>
+                  </a:tcPr>
+                </a:tc>
+              </a:tr>
+              <a:tr h="201168">
+                <a:tc>
+                  <a:txBody>
+                    <a:bodyPr/>
+                    <a:lstStyle/>
+                    <a:p>
+                      <a:pPr>
+                        <a:defRPr sz="800">
+                          <a:solidFill>
+                            <a:srgbClr val="2C3E50"/>
+                          </a:solidFill>
+                          <a:latin typeface="Calibri"/>
+                        </a:defRPr>
+                      </a:pPr>
+                      <a:r>
+                        <a:t>heat_3d</a:t>
+                      </a:r>
+                    </a:p>
+                  </a:txBody>
+                  <a:tcPr>
+                    <a:solidFill>
+                      <a:srgbClr val="ECF0F1"/>
+                    </a:solidFill>
+                  </a:tcPr>
+                </a:tc>
+                <a:tc>
+                  <a:txBody>
+                    <a:bodyPr/>
+                    <a:lstStyle/>
+                    <a:p>
+                      <a:pPr>
+                        <a:defRPr sz="800">
+                          <a:solidFill>
+                            <a:srgbClr val="2C3E50"/>
+                          </a:solidFill>
+                          <a:latin typeface="Calibri"/>
+                        </a:defRPr>
+                      </a:pPr>
+                      <a:r>
+                        <a:t>8x</a:t>
+                      </a:r>
+                    </a:p>
+                  </a:txBody>
+                  <a:tcPr>
+                    <a:solidFill>
+                      <a:srgbClr val="ECF0F1"/>
+                    </a:solidFill>
+                  </a:tcPr>
+                </a:tc>
+                <a:tc>
+                  <a:txBody>
+                    <a:bodyPr/>
+                    <a:lstStyle/>
+                    <a:p>
+                      <a:pPr>
+                        <a:defRPr sz="800">
+                          <a:solidFill>
+                            <a:srgbClr val="2C3E50"/>
+                          </a:solidFill>
+                          <a:latin typeface="Calibri"/>
+                        </a:defRPr>
+                      </a:pPr>
+                      <a:r>
+                        <a:t>12.245</a:t>
+                      </a:r>
+                    </a:p>
+                  </a:txBody>
+                  <a:tcPr>
+                    <a:solidFill>
+                      <a:srgbClr val="ECF0F1"/>
+                    </a:solidFill>
+                  </a:tcPr>
+                </a:tc>
+                <a:tc>
+                  <a:txBody>
+                    <a:bodyPr/>
+                    <a:lstStyle/>
+                    <a:p>
+                      <a:pPr>
+                        <a:defRPr sz="800">
+                          <a:solidFill>
+                            <a:srgbClr val="2C3E50"/>
+                          </a:solidFill>
+                          <a:latin typeface="Calibri"/>
+                        </a:defRPr>
+                      </a:pPr>
+                      <a:r>
+                        <a:t>12.324</a:t>
+                      </a:r>
+                    </a:p>
+                  </a:txBody>
+                  <a:tcPr>
+                    <a:solidFill>
+                      <a:srgbClr val="ECF0F1"/>
+                    </a:solidFill>
+                  </a:tcPr>
+                </a:tc>
+                <a:tc>
+                  <a:txBody>
+                    <a:bodyPr/>
+                    <a:lstStyle/>
+                    <a:p>
+                      <a:pPr>
+                        <a:defRPr sz="800">
+                          <a:solidFill>
+                            <a:srgbClr val="2C3E50"/>
+                          </a:solidFill>
+                          <a:latin typeface="Calibri"/>
+                        </a:defRPr>
+                      </a:pPr>
+                      <a:r>
+                        <a:t>0.99x</a:t>
+                      </a:r>
+                    </a:p>
+                  </a:txBody>
+                  <a:tcPr>
+                    <a:solidFill>
+                      <a:srgbClr val="ECF0F1"/>
+                    </a:solidFill>
+                  </a:tcPr>
+                </a:tc>
+                <a:tc>
+                  <a:txBody>
+                    <a:bodyPr/>
+                    <a:lstStyle/>
+                    <a:p>
+                      <a:pPr>
+                        <a:defRPr sz="800">
+                          <a:solidFill>
+                            <a:srgbClr val="2C3E50"/>
+                          </a:solidFill>
+                          <a:latin typeface="Calibri"/>
+                        </a:defRPr>
+                      </a:pPr>
+                      <a:r>
+                        <a:t>TIE</a:t>
+                      </a:r>
+                    </a:p>
+                  </a:txBody>
+                  <a:tcPr>
+                    <a:solidFill>
+                      <a:srgbClr val="ECF0F1"/>
+                    </a:solidFill>
+                  </a:tcPr>
+                </a:tc>
+              </a:tr>
+              <a:tr h="201168">
+                <a:tc>
+                  <a:txBody>
+                    <a:bodyPr/>
+                    <a:lstStyle/>
+                    <a:p>
+                      <a:pPr>
+                        <a:defRPr sz="800">
+                          <a:solidFill>
+                            <a:srgbClr val="2C3E50"/>
+                          </a:solidFill>
+                          <a:latin typeface="Calibri"/>
+                        </a:defRPr>
+                      </a:pPr>
+                      <a:r>
+                        <a:t>jacobi_1d</a:t>
+                      </a:r>
+                    </a:p>
+                  </a:txBody>
+                  <a:tcPr>
+                    <a:solidFill>
+                      <a:srgbClr val="FFFFFF"/>
+                    </a:solidFill>
+                  </a:tcPr>
+                </a:tc>
+                <a:tc>
+                  <a:txBody>
+                    <a:bodyPr/>
+                    <a:lstStyle/>
+                    <a:p>
+                      <a:pPr>
+                        <a:defRPr sz="800">
+                          <a:solidFill>
+                            <a:srgbClr val="2C3E50"/>
+                          </a:solidFill>
+                          <a:latin typeface="Calibri"/>
+                        </a:defRPr>
+                      </a:pPr>
+                      <a:r>
+                        <a:t>8x</a:t>
+                      </a:r>
+                    </a:p>
+                  </a:txBody>
+                  <a:tcPr>
+                    <a:solidFill>
+                      <a:srgbClr val="FFFFFF"/>
+                    </a:solidFill>
+                  </a:tcPr>
+                </a:tc>
+                <a:tc>
+                  <a:txBody>
+                    <a:bodyPr/>
+                    <a:lstStyle/>
+                    <a:p>
+                      <a:pPr>
+                        <a:defRPr sz="800">
+                          <a:solidFill>
+                            <a:srgbClr val="2C3E50"/>
+                          </a:solidFill>
+                          <a:latin typeface="Calibri"/>
+                        </a:defRPr>
+                      </a:pPr>
+                      <a:r>
+                        <a:t>0.013</a:t>
+                      </a:r>
+                    </a:p>
+                  </a:txBody>
+                  <a:tcPr>
+                    <a:solidFill>
+                      <a:srgbClr val="FFFFFF"/>
+                    </a:solidFill>
+                  </a:tcPr>
+                </a:tc>
+                <a:tc>
+                  <a:txBody>
+                    <a:bodyPr/>
+                    <a:lstStyle/>
+                    <a:p>
+                      <a:pPr>
+                        <a:defRPr sz="800">
+                          <a:solidFill>
+                            <a:srgbClr val="2C3E50"/>
+                          </a:solidFill>
+                          <a:latin typeface="Calibri"/>
+                        </a:defRPr>
+                      </a:pPr>
+                      <a:r>
+                        <a:t>2.729</a:t>
+                      </a:r>
+                    </a:p>
+                  </a:txBody>
+                  <a:tcPr>
+                    <a:solidFill>
+                      <a:srgbClr val="FFFFFF"/>
+                    </a:solidFill>
+                  </a:tcPr>
+                </a:tc>
+                <a:tc>
+                  <a:txBody>
+                    <a:bodyPr/>
+                    <a:lstStyle/>
+                    <a:p>
+                      <a:pPr>
+                        <a:defRPr sz="800">
+                          <a:solidFill>
+                            <a:srgbClr val="2C3E50"/>
+                          </a:solidFill>
+                          <a:latin typeface="Calibri"/>
+                        </a:defRPr>
+                      </a:pPr>
+                      <a:r>
+                        <a:t>0.00x</a:t>
+                      </a:r>
+                    </a:p>
+                  </a:txBody>
+                  <a:tcPr>
+                    <a:solidFill>
+                      <a:srgbClr val="FFFFFF"/>
+                    </a:solidFill>
+                  </a:tcPr>
+                </a:tc>
+                <a:tc>
+                  <a:txBody>
+                    <a:bodyPr/>
+                    <a:lstStyle/>
+                    <a:p>
+                      <a:pPr>
+                        <a:defRPr sz="800">
+                          <a:solidFill>
+                            <a:srgbClr val="2C3E50"/>
+                          </a:solidFill>
+                          <a:latin typeface="Calibri"/>
+                        </a:defRPr>
+                      </a:pPr>
+                      <a:r>
+                        <a:t>WA</a:t>
+                      </a:r>
+                    </a:p>
+                  </a:txBody>
+                  <a:tcPr>
+                    <a:solidFill>
+                      <a:srgbClr val="D5F5E3"/>
+                    </a:solidFill>
+                  </a:tcPr>
+                </a:tc>
+              </a:tr>
+              <a:tr h="201168">
+                <a:tc>
+                  <a:txBody>
+                    <a:bodyPr/>
+                    <a:lstStyle/>
+                    <a:p>
+                      <a:pPr>
+                        <a:defRPr sz="800">
+                          <a:solidFill>
+                            <a:srgbClr val="2C3E50"/>
+                          </a:solidFill>
+                          <a:latin typeface="Calibri"/>
+                        </a:defRPr>
+                      </a:pPr>
+                      <a:r>
+                        <a:t>jacobi_2d</a:t>
+                      </a:r>
+                    </a:p>
+                  </a:txBody>
+                  <a:tcPr>
+                    <a:solidFill>
+                      <a:srgbClr val="ECF0F1"/>
+                    </a:solidFill>
+                  </a:tcPr>
+                </a:tc>
+                <a:tc>
+                  <a:txBody>
+                    <a:bodyPr/>
+                    <a:lstStyle/>
+                    <a:p>
+                      <a:pPr>
+                        <a:defRPr sz="800">
+                          <a:solidFill>
+                            <a:srgbClr val="2C3E50"/>
+                          </a:solidFill>
+                          <a:latin typeface="Calibri"/>
+                        </a:defRPr>
+                      </a:pPr>
+                      <a:r>
+                        <a:t>8x</a:t>
+                      </a:r>
+                    </a:p>
+                  </a:txBody>
+                  <a:tcPr>
+                    <a:solidFill>
+                      <a:srgbClr val="ECF0F1"/>
+                    </a:solidFill>
+                  </a:tcPr>
+                </a:tc>
+                <a:tc>
+                  <a:txBody>
+                    <a:bodyPr/>
+                    <a:lstStyle/>
+                    <a:p>
+                      <a:pPr>
+                        <a:defRPr sz="800">
+                          <a:solidFill>
+                            <a:srgbClr val="2C3E50"/>
+                          </a:solidFill>
+                          <a:latin typeface="Calibri"/>
+                        </a:defRPr>
+                      </a:pPr>
+                      <a:r>
+                        <a:t>32.117</a:t>
+                      </a:r>
+                    </a:p>
+                  </a:txBody>
+                  <a:tcPr>
+                    <a:solidFill>
+                      <a:srgbClr val="ECF0F1"/>
+                    </a:solidFill>
+                  </a:tcPr>
+                </a:tc>
+                <a:tc>
+                  <a:txBody>
+                    <a:bodyPr/>
+                    <a:lstStyle/>
+                    <a:p>
+                      <a:pPr>
+                        <a:defRPr sz="800">
+                          <a:solidFill>
+                            <a:srgbClr val="2C3E50"/>
+                          </a:solidFill>
+                          <a:latin typeface="Calibri"/>
+                        </a:defRPr>
+                      </a:pPr>
+                      <a:r>
+                        <a:t>at 11:14:</a:t>
+                      </a:r>
+                    </a:p>
+                    <a:p>
+                      <a:r>
+                        <a:t>de</a:t>
+                      </a:r>
+                    </a:p>
+                  </a:txBody>
+                  <a:tcPr>
+                    <a:solidFill>
+                      <a:srgbClr val="ECF0F1"/>
+                    </a:solidFill>
+                  </a:tcPr>
+                </a:tc>
+                <a:tc>
+                  <a:txBody>
+                    <a:bodyPr/>
+                    <a:lstStyle/>
+                    <a:p>
+                      <a:pPr>
+                        <a:defRPr sz="800">
+                          <a:solidFill>
+                            <a:srgbClr val="2C3E50"/>
+                          </a:solidFill>
+                          <a:latin typeface="Calibri"/>
+                        </a:defRPr>
+                      </a:pPr>
+                    </a:p>
+                  </a:txBody>
+                  <a:tcPr>
+                    <a:solidFill>
+                      <a:srgbClr val="ECF0F1"/>
+                    </a:solidFill>
+                  </a:tcPr>
+                </a:tc>
+                <a:tc>
+                  <a:txBody>
+                    <a:bodyPr/>
+                    <a:lstStyle/>
+                    <a:p>
+                      <a:pPr>
+                        <a:defRPr sz="800">
+                          <a:solidFill>
+                            <a:srgbClr val="2C3E50"/>
+                          </a:solidFill>
+                          <a:latin typeface="Calibri"/>
+                        </a:defRPr>
+                      </a:pPr>
+                      <a:r>
+                        <a:t>WA-only</a:t>
+                      </a:r>
+                    </a:p>
+                  </a:txBody>
+                  <a:tcPr>
+                    <a:solidFill>
+                      <a:srgbClr val="ECF0F1"/>
+                    </a:solidFill>
+                  </a:tcPr>
+                </a:tc>
+              </a:tr>
+              <a:tr h="201168">
+                <a:tc>
+                  <a:txBody>
+                    <a:bodyPr/>
+                    <a:lstStyle/>
+                    <a:p>
+                      <a:pPr>
+                        <a:defRPr sz="800">
+                          <a:solidFill>
+                            <a:srgbClr val="2C3E50"/>
+                          </a:solidFill>
+                          <a:latin typeface="Calibri"/>
+                        </a:defRPr>
+                      </a:pPr>
+                      <a:r>
+                        <a:t>lu</a:t>
+                      </a:r>
+                    </a:p>
+                  </a:txBody>
+                  <a:tcPr>
+                    <a:solidFill>
+                      <a:srgbClr val="FFFFFF"/>
+                    </a:solidFill>
+                  </a:tcPr>
+                </a:tc>
+                <a:tc>
+                  <a:txBody>
+                    <a:bodyPr/>
+                    <a:lstStyle/>
+                    <a:p>
+                      <a:pPr>
+                        <a:defRPr sz="800">
+                          <a:solidFill>
+                            <a:srgbClr val="2C3E50"/>
+                          </a:solidFill>
+                          <a:latin typeface="Calibri"/>
+                        </a:defRPr>
+                      </a:pPr>
+                      <a:r>
+                        <a:t>2x</a:t>
+                      </a:r>
+                    </a:p>
+                  </a:txBody>
+                  <a:tcPr>
+                    <a:solidFill>
+                      <a:srgbClr val="FFFFFF"/>
+                    </a:solidFill>
+                  </a:tcPr>
+                </a:tc>
+                <a:tc>
+                  <a:txBody>
+                    <a:bodyPr/>
+                    <a:lstStyle/>
+                    <a:p>
+                      <a:pPr>
+                        <a:defRPr sz="800">
+                          <a:solidFill>
+                            <a:srgbClr val="2C3E50"/>
+                          </a:solidFill>
+                          <a:latin typeface="Calibri"/>
+                        </a:defRPr>
+                      </a:pPr>
+                      <a:r>
+                        <a:t>39.873</a:t>
+                      </a:r>
+                    </a:p>
+                  </a:txBody>
+                  <a:tcPr>
+                    <a:solidFill>
+                      <a:srgbClr val="FFFFFF"/>
+                    </a:solidFill>
+                  </a:tcPr>
+                </a:tc>
+                <a:tc>
+                  <a:txBody>
+                    <a:bodyPr/>
+                    <a:lstStyle/>
+                    <a:p>
+                      <a:pPr>
+                        <a:defRPr sz="800">
+                          <a:solidFill>
+                            <a:srgbClr val="2C3E50"/>
+                          </a:solidFill>
+                          <a:latin typeface="Calibri"/>
+                        </a:defRPr>
+                      </a:pPr>
+                      <a:r>
+                        <a:t>18.613</a:t>
+                      </a:r>
+                    </a:p>
+                  </a:txBody>
+                  <a:tcPr>
+                    <a:solidFill>
+                      <a:srgbClr val="FFFFFF"/>
+                    </a:solidFill>
+                  </a:tcPr>
+                </a:tc>
+                <a:tc>
+                  <a:txBody>
+                    <a:bodyPr/>
+                    <a:lstStyle/>
+                    <a:p>
+                      <a:pPr>
+                        <a:defRPr sz="800">
+                          <a:solidFill>
+                            <a:srgbClr val="2C3E50"/>
+                          </a:solidFill>
+                          <a:latin typeface="Calibri"/>
+                        </a:defRPr>
+                      </a:pPr>
+                      <a:r>
+                        <a:t>2.14x</a:t>
+                      </a:r>
+                    </a:p>
+                  </a:txBody>
+                  <a:tcPr>
+                    <a:solidFill>
+                      <a:srgbClr val="FFFFFF"/>
+                    </a:solidFill>
+                  </a:tcPr>
+                </a:tc>
+                <a:tc>
+                  <a:txBody>
+                    <a:bodyPr/>
+                    <a:lstStyle/>
+                    <a:p>
+                      <a:pPr>
+                        <a:defRPr sz="800">
+                          <a:solidFill>
+                            <a:srgbClr val="2C3E50"/>
+                          </a:solidFill>
+                          <a:latin typeface="Calibri"/>
+                        </a:defRPr>
+                      </a:pPr>
+                      <a:r>
+                        <a:t>NA</a:t>
+                      </a:r>
+                    </a:p>
+                  </a:txBody>
+                  <a:tcPr>
+                    <a:solidFill>
+                      <a:srgbClr val="FADBD8"/>
+                    </a:solidFill>
+                  </a:tcPr>
+                </a:tc>
+              </a:tr>
+              <a:tr h="201168">
+                <a:tc>
+                  <a:txBody>
+                    <a:bodyPr/>
+                    <a:lstStyle/>
+                    <a:p>
+                      <a:pPr>
+                        <a:defRPr sz="800">
+                          <a:solidFill>
+                            <a:srgbClr val="2C3E50"/>
+                          </a:solidFill>
+                          <a:latin typeface="Calibri"/>
+                        </a:defRPr>
+                      </a:pPr>
+                      <a:r>
+                        <a:t>ludcmp</a:t>
+                      </a:r>
+                    </a:p>
+                  </a:txBody>
+                  <a:tcPr>
+                    <a:solidFill>
+                      <a:srgbClr val="ECF0F1"/>
+                    </a:solidFill>
+                  </a:tcPr>
+                </a:tc>
+                <a:tc>
+                  <a:txBody>
+                    <a:bodyPr/>
+                    <a:lstStyle/>
+                    <a:p>
+                      <a:pPr>
+                        <a:defRPr sz="800">
+                          <a:solidFill>
+                            <a:srgbClr val="2C3E50"/>
+                          </a:solidFill>
+                          <a:latin typeface="Calibri"/>
+                        </a:defRPr>
+                      </a:pPr>
+                      <a:r>
+                        <a:t>2x</a:t>
+                      </a:r>
+                    </a:p>
+                  </a:txBody>
+                  <a:tcPr>
+                    <a:solidFill>
+                      <a:srgbClr val="ECF0F1"/>
+                    </a:solidFill>
+                  </a:tcPr>
+                </a:tc>
+                <a:tc>
+                  <a:txBody>
+                    <a:bodyPr/>
+                    <a:lstStyle/>
+                    <a:p>
+                      <a:pPr>
+                        <a:defRPr sz="800">
+                          <a:solidFill>
+                            <a:srgbClr val="2C3E50"/>
+                          </a:solidFill>
+                          <a:latin typeface="Calibri"/>
+                        </a:defRPr>
+                      </a:pPr>
+                      <a:r>
+                        <a:t>84.444</a:t>
+                      </a:r>
+                    </a:p>
+                  </a:txBody>
+                  <a:tcPr>
+                    <a:solidFill>
+                      <a:srgbClr val="ECF0F1"/>
+                    </a:solidFill>
+                  </a:tcPr>
+                </a:tc>
+                <a:tc>
+                  <a:txBody>
+                    <a:bodyPr/>
+                    <a:lstStyle/>
+                    <a:p>
+                      <a:pPr>
+                        <a:defRPr sz="800">
+                          <a:solidFill>
+                            <a:srgbClr val="2C3E50"/>
+                          </a:solidFill>
+                          <a:latin typeface="Calibri"/>
+                        </a:defRPr>
+                      </a:pPr>
+                      <a:r>
+                        <a:t>84.270</a:t>
+                      </a:r>
+                    </a:p>
+                  </a:txBody>
+                  <a:tcPr>
+                    <a:solidFill>
+                      <a:srgbClr val="ECF0F1"/>
+                    </a:solidFill>
+                  </a:tcPr>
+                </a:tc>
+                <a:tc>
+                  <a:txBody>
+                    <a:bodyPr/>
+                    <a:lstStyle/>
+                    <a:p>
+                      <a:pPr>
+                        <a:defRPr sz="800">
+                          <a:solidFill>
+                            <a:srgbClr val="2C3E50"/>
+                          </a:solidFill>
+                          <a:latin typeface="Calibri"/>
+                        </a:defRPr>
+                      </a:pPr>
+                      <a:r>
+                        <a:t>1.00x</a:t>
+                      </a:r>
+                    </a:p>
+                  </a:txBody>
+                  <a:tcPr>
+                    <a:solidFill>
+                      <a:srgbClr val="ECF0F1"/>
+                    </a:solidFill>
+                  </a:tcPr>
+                </a:tc>
+                <a:tc>
+                  <a:txBody>
+                    <a:bodyPr/>
+                    <a:lstStyle/>
+                    <a:p>
+                      <a:pPr>
+                        <a:defRPr sz="800">
+                          <a:solidFill>
+                            <a:srgbClr val="2C3E50"/>
+                          </a:solidFill>
+                          <a:latin typeface="Calibri"/>
+                        </a:defRPr>
+                      </a:pPr>
+                      <a:r>
+                        <a:t>TIE</a:t>
+                      </a:r>
+                    </a:p>
+                  </a:txBody>
+                  <a:tcPr>
+                    <a:solidFill>
+                      <a:srgbClr val="ECF0F1"/>
+                    </a:solidFill>
+                  </a:tcPr>
+                </a:tc>
+              </a:tr>
+              <a:tr h="201168">
+                <a:tc>
+                  <a:txBody>
+                    <a:bodyPr/>
+                    <a:lstStyle/>
+                    <a:p>
+                      <a:pPr>
+                        <a:defRPr sz="800">
+                          <a:solidFill>
+                            <a:srgbClr val="2C3E50"/>
+                          </a:solidFill>
+                          <a:latin typeface="Calibri"/>
+                        </a:defRPr>
+                      </a:pPr>
+                      <a:r>
+                        <a:t>mvt</a:t>
+                      </a:r>
+                    </a:p>
+                  </a:txBody>
+                  <a:tcPr>
+                    <a:solidFill>
+                      <a:srgbClr val="FFFFFF"/>
+                    </a:solidFill>
+                  </a:tcPr>
+                </a:tc>
+                <a:tc>
+                  <a:txBody>
+                    <a:bodyPr/>
+                    <a:lstStyle/>
+                    <a:p>
+                      <a:pPr>
+                        <a:defRPr sz="800">
+                          <a:solidFill>
+                            <a:srgbClr val="2C3E50"/>
+                          </a:solidFill>
+                          <a:latin typeface="Calibri"/>
+                        </a:defRPr>
+                      </a:pPr>
+                      <a:r>
+                        <a:t>8x</a:t>
+                      </a:r>
+                    </a:p>
+                  </a:txBody>
+                  <a:tcPr>
+                    <a:solidFill>
+                      <a:srgbClr val="FFFFFF"/>
+                    </a:solidFill>
+                  </a:tcPr>
+                </a:tc>
+                <a:tc>
+                  <a:txBody>
+                    <a:bodyPr/>
+                    <a:lstStyle/>
+                    <a:p>
+                      <a:pPr>
+                        <a:defRPr sz="800">
+                          <a:solidFill>
+                            <a:srgbClr val="2C3E50"/>
+                          </a:solidFill>
+                          <a:latin typeface="Calibri"/>
+                        </a:defRPr>
+                      </a:pPr>
+                      <a:r>
+                        <a:t>0.021</a:t>
+                      </a:r>
+                    </a:p>
+                  </a:txBody>
+                  <a:tcPr>
+                    <a:solidFill>
+                      <a:srgbClr val="FFFFFF"/>
+                    </a:solidFill>
+                  </a:tcPr>
+                </a:tc>
+                <a:tc>
+                  <a:txBody>
+                    <a:bodyPr/>
+                    <a:lstStyle/>
+                    <a:p>
+                      <a:pPr>
+                        <a:defRPr sz="800">
+                          <a:solidFill>
+                            <a:srgbClr val="2C3E50"/>
+                          </a:solidFill>
+                          <a:latin typeface="Calibri"/>
+                        </a:defRPr>
+                      </a:pPr>
+                      <a:r>
+                        <a:t>0.021</a:t>
+                      </a:r>
+                    </a:p>
+                  </a:txBody>
+                  <a:tcPr>
+                    <a:solidFill>
+                      <a:srgbClr val="FFFFFF"/>
+                    </a:solidFill>
+                  </a:tcPr>
+                </a:tc>
+                <a:tc>
+                  <a:txBody>
+                    <a:bodyPr/>
+                    <a:lstStyle/>
+                    <a:p>
+                      <a:pPr>
+                        <a:defRPr sz="800">
+                          <a:solidFill>
+                            <a:srgbClr val="2C3E50"/>
+                          </a:solidFill>
+                          <a:latin typeface="Calibri"/>
+                        </a:defRPr>
+                      </a:pPr>
+                      <a:r>
+                        <a:t>1.00x</a:t>
+                      </a:r>
+                    </a:p>
+                  </a:txBody>
+                  <a:tcPr>
+                    <a:solidFill>
+                      <a:srgbClr val="FFFFFF"/>
+                    </a:solidFill>
+                  </a:tcPr>
+                </a:tc>
+                <a:tc>
+                  <a:txBody>
+                    <a:bodyPr/>
+                    <a:lstStyle/>
+                    <a:p>
+                      <a:pPr>
+                        <a:defRPr sz="800">
+                          <a:solidFill>
+                            <a:srgbClr val="2C3E50"/>
+                          </a:solidFill>
+                          <a:latin typeface="Calibri"/>
+                        </a:defRPr>
+                      </a:pPr>
+                      <a:r>
+                        <a:t>TIE</a:t>
+                      </a:r>
+                    </a:p>
+                  </a:txBody>
+                  <a:tcPr>
+                    <a:solidFill>
+                      <a:srgbClr val="FFFFFF"/>
+                    </a:solidFill>
+                  </a:tcPr>
+                </a:tc>
+              </a:tr>
+              <a:tr h="201168">
+                <a:tc>
+                  <a:txBody>
+                    <a:bodyPr/>
+                    <a:lstStyle/>
+                    <a:p>
+                      <a:pPr>
+                        <a:defRPr sz="800">
+                          <a:solidFill>
+                            <a:srgbClr val="2C3E50"/>
+                          </a:solidFill>
+                          <a:latin typeface="Calibri"/>
+                        </a:defRPr>
+                      </a:pPr>
+                      <a:r>
+                        <a:t>nussinov</a:t>
+                      </a:r>
+                    </a:p>
+                  </a:txBody>
+                  <a:tcPr>
+                    <a:solidFill>
+                      <a:srgbClr val="ECF0F1"/>
+                    </a:solidFill>
+                  </a:tcPr>
+                </a:tc>
+                <a:tc>
+                  <a:txBody>
+                    <a:bodyPr/>
+                    <a:lstStyle/>
+                    <a:p>
+                      <a:pPr>
+                        <a:defRPr sz="800">
+                          <a:solidFill>
+                            <a:srgbClr val="2C3E50"/>
+                          </a:solidFill>
+                          <a:latin typeface="Calibri"/>
+                        </a:defRPr>
+                      </a:pPr>
+                      <a:r>
+                        <a:t>2x</a:t>
+                      </a:r>
+                    </a:p>
+                  </a:txBody>
+                  <a:tcPr>
+                    <a:solidFill>
+                      <a:srgbClr val="ECF0F1"/>
+                    </a:solidFill>
+                  </a:tcPr>
+                </a:tc>
+                <a:tc>
+                  <a:txBody>
+                    <a:bodyPr/>
+                    <a:lstStyle/>
+                    <a:p>
+                      <a:pPr>
+                        <a:defRPr sz="800">
+                          <a:solidFill>
+                            <a:srgbClr val="2C3E50"/>
+                          </a:solidFill>
+                          <a:latin typeface="Calibri"/>
+                        </a:defRPr>
+                      </a:pPr>
+                      <a:r>
+                        <a:t>139.520</a:t>
+                      </a:r>
+                    </a:p>
+                  </a:txBody>
+                  <a:tcPr>
+                    <a:solidFill>
+                      <a:srgbClr val="ECF0F1"/>
+                    </a:solidFill>
+                  </a:tcPr>
+                </a:tc>
+                <a:tc>
+                  <a:txBody>
+                    <a:bodyPr/>
+                    <a:lstStyle/>
+                    <a:p>
+                      <a:pPr>
+                        <a:defRPr sz="800">
+                          <a:solidFill>
+                            <a:srgbClr val="2C3E50"/>
+                          </a:solidFill>
+                          <a:latin typeface="Calibri"/>
+                        </a:defRPr>
+                      </a:pPr>
+                      <a:r>
+                        <a:t>153.773</a:t>
+                      </a:r>
+                    </a:p>
+                  </a:txBody>
+                  <a:tcPr>
+                    <a:solidFill>
+                      <a:srgbClr val="ECF0F1"/>
+                    </a:solidFill>
+                  </a:tcPr>
+                </a:tc>
+                <a:tc>
+                  <a:txBody>
+                    <a:bodyPr/>
+                    <a:lstStyle/>
+                    <a:p>
+                      <a:pPr>
+                        <a:defRPr sz="800">
+                          <a:solidFill>
+                            <a:srgbClr val="2C3E50"/>
+                          </a:solidFill>
+                          <a:latin typeface="Calibri"/>
+                        </a:defRPr>
+                      </a:pPr>
+                      <a:r>
+                        <a:t>0.91x</a:t>
+                      </a:r>
+                    </a:p>
+                  </a:txBody>
+                  <a:tcPr>
+                    <a:solidFill>
+                      <a:srgbClr val="ECF0F1"/>
+                    </a:solidFill>
+                  </a:tcPr>
+                </a:tc>
+                <a:tc>
+                  <a:txBody>
+                    <a:bodyPr/>
+                    <a:lstStyle/>
+                    <a:p>
+                      <a:pPr>
+                        <a:defRPr sz="800">
+                          <a:solidFill>
+                            <a:srgbClr val="2C3E50"/>
+                          </a:solidFill>
+                          <a:latin typeface="Calibri"/>
+                        </a:defRPr>
+                      </a:pPr>
+                      <a:r>
+                        <a:t>WA</a:t>
+                      </a:r>
+                    </a:p>
+                  </a:txBody>
+                  <a:tcPr>
+                    <a:solidFill>
+                      <a:srgbClr val="D5F5E3"/>
+                    </a:solidFill>
+                  </a:tcPr>
+                </a:tc>
+              </a:tr>
+              <a:tr h="201168">
+                <a:tc>
+                  <a:txBody>
+                    <a:bodyPr/>
+                    <a:lstStyle/>
+                    <a:p>
+                      <a:pPr>
+                        <a:defRPr sz="800">
+                          <a:solidFill>
+                            <a:srgbClr val="2C3E50"/>
+                          </a:solidFill>
+                          <a:latin typeface="Calibri"/>
+                        </a:defRPr>
+                      </a:pPr>
+                      <a:r>
+                        <a:t>seidel_2d</a:t>
+                      </a:r>
+                    </a:p>
+                  </a:txBody>
+                  <a:tcPr>
+                    <a:solidFill>
+                      <a:srgbClr val="FFFFFF"/>
+                    </a:solidFill>
+                  </a:tcPr>
+                </a:tc>
+                <a:tc>
+                  <a:txBody>
+                    <a:bodyPr/>
+                    <a:lstStyle/>
+                    <a:p>
+                      <a:pPr>
+                        <a:defRPr sz="800">
+                          <a:solidFill>
+                            <a:srgbClr val="2C3E50"/>
+                          </a:solidFill>
+                          <a:latin typeface="Calibri"/>
+                        </a:defRPr>
+                      </a:pPr>
+                      <a:r>
+                        <a:t>2x</a:t>
+                      </a:r>
+                    </a:p>
+                  </a:txBody>
+                  <a:tcPr>
+                    <a:solidFill>
+                      <a:srgbClr val="FFFFFF"/>
+                    </a:solidFill>
+                  </a:tcPr>
+                </a:tc>
+                <a:tc>
+                  <a:txBody>
+                    <a:bodyPr/>
+                    <a:lstStyle/>
+                    <a:p>
+                      <a:pPr>
+                        <a:defRPr sz="800">
+                          <a:solidFill>
+                            <a:srgbClr val="2C3E50"/>
+                          </a:solidFill>
+                          <a:latin typeface="Calibri"/>
+                        </a:defRPr>
+                      </a:pPr>
+                      <a:r>
+                        <a:t>187.571</a:t>
+                      </a:r>
+                    </a:p>
+                  </a:txBody>
+                  <a:tcPr>
+                    <a:solidFill>
+                      <a:srgbClr val="FFFFFF"/>
+                    </a:solidFill>
+                  </a:tcPr>
+                </a:tc>
+                <a:tc>
+                  <a:txBody>
+                    <a:bodyPr/>
+                    <a:lstStyle/>
+                    <a:p>
+                      <a:pPr>
+                        <a:defRPr sz="800">
+                          <a:solidFill>
+                            <a:srgbClr val="2C3E50"/>
+                          </a:solidFill>
+                          <a:latin typeface="Calibri"/>
+                        </a:defRPr>
+                      </a:pPr>
+                      <a:r>
+                        <a:t>0.038*</a:t>
+                      </a:r>
+                    </a:p>
+                  </a:txBody>
+                  <a:tcPr>
+                    <a:solidFill>
+                      <a:srgbClr val="FFFFFF"/>
+                    </a:solidFill>
+                  </a:tcPr>
+                </a:tc>
+                <a:tc>
+                  <a:txBody>
+                    <a:bodyPr/>
+                    <a:lstStyle/>
+                    <a:p>
+                      <a:pPr>
+                        <a:defRPr sz="800">
+                          <a:solidFill>
+                            <a:srgbClr val="2C3E50"/>
+                          </a:solidFill>
+                          <a:latin typeface="Calibri"/>
+                        </a:defRPr>
+                      </a:pPr>
+                      <a:r>
+                        <a:t>N/A</a:t>
+                      </a:r>
+                    </a:p>
+                  </a:txBody>
+                  <a:tcPr>
+                    <a:solidFill>
+                      <a:srgbClr val="FFFFFF"/>
+                    </a:solidFill>
+                  </a:tcPr>
+                </a:tc>
+                <a:tc>
+                  <a:txBody>
+                    <a:bodyPr/>
+                    <a:lstStyle/>
+                    <a:p>
+                      <a:pPr>
+                        <a:defRPr sz="800">
+                          <a:solidFill>
+                            <a:srgbClr val="2C3E50"/>
+                          </a:solidFill>
+                          <a:latin typeface="Calibri"/>
+                        </a:defRPr>
+                      </a:pPr>
+                      <a:r>
+                        <a:t>WA-only</a:t>
+                      </a:r>
+                    </a:p>
+                  </a:txBody>
+                  <a:tcPr>
+                    <a:solidFill>
+                      <a:srgbClr val="FFFFFF"/>
+                    </a:solidFill>
+                  </a:tcPr>
+                </a:tc>
+              </a:tr>
+              <a:tr h="201168">
+                <a:tc>
+                  <a:txBody>
+                    <a:bodyPr/>
+                    <a:lstStyle/>
+                    <a:p>
+                      <a:pPr>
+                        <a:defRPr sz="800">
+                          <a:solidFill>
+                            <a:srgbClr val="2C3E50"/>
+                          </a:solidFill>
+                          <a:latin typeface="Calibri"/>
+                        </a:defRPr>
+                      </a:pPr>
+                      <a:r>
                         <a:t>symm</a:t>
                       </a:r>
                     </a:p>
                   </a:txBody>
                   <a:tcPr>
                     <a:solidFill>
+                      <a:srgbClr val="ECF0F1"/>
+                    </a:solidFill>
+                  </a:tcPr>
+                </a:tc>
+                <a:tc>
+                  <a:txBody>
+                    <a:bodyPr/>
+                    <a:lstStyle/>
+                    <a:p>
+                      <a:pPr>
+                        <a:defRPr sz="800">
+                          <a:solidFill>
+                            <a:srgbClr val="2C3E50"/>
+                          </a:solidFill>
+                          <a:latin typeface="Calibri"/>
+                        </a:defRPr>
+                      </a:pPr>
+                      <a:r>
+                        <a:t>8x</a:t>
+                      </a:r>
+                    </a:p>
+                  </a:txBody>
+                  <a:tcPr>
+                    <a:solidFill>
+                      <a:srgbClr val="ECF0F1"/>
+                    </a:solidFill>
+                  </a:tcPr>
+                </a:tc>
+                <a:tc>
+                  <a:txBody>
+                    <a:bodyPr/>
+                    <a:lstStyle/>
+                    <a:p>
+                      <a:pPr>
+                        <a:defRPr sz="800">
+                          <a:solidFill>
+                            <a:srgbClr val="2C3E50"/>
+                          </a:solidFill>
+                          <a:latin typeface="Calibri"/>
+                        </a:defRPr>
+                      </a:pPr>
+                      <a:r>
+                        <a:t>4.251</a:t>
+                      </a:r>
+                    </a:p>
+                  </a:txBody>
+                  <a:tcPr>
+                    <a:solidFill>
+                      <a:srgbClr val="ECF0F1"/>
+                    </a:solidFill>
+                  </a:tcPr>
+                </a:tc>
+                <a:tc>
+                  <a:txBody>
+                    <a:bodyPr/>
+                    <a:lstStyle/>
+                    <a:p>
+                      <a:pPr>
+                        <a:defRPr sz="800">
+                          <a:solidFill>
+                            <a:srgbClr val="2C3E50"/>
+                          </a:solidFill>
+                          <a:latin typeface="Calibri"/>
+                        </a:defRPr>
+                      </a:pPr>
+                      <a:r>
+                        <a:t>6.770</a:t>
+                      </a:r>
+                    </a:p>
+                  </a:txBody>
+                  <a:tcPr>
+                    <a:solidFill>
+                      <a:srgbClr val="ECF0F1"/>
+                    </a:solidFill>
+                  </a:tcPr>
+                </a:tc>
+                <a:tc>
+                  <a:txBody>
+                    <a:bodyPr/>
+                    <a:lstStyle/>
+                    <a:p>
+                      <a:pPr>
+                        <a:defRPr sz="800">
+                          <a:solidFill>
+                            <a:srgbClr val="2C3E50"/>
+                          </a:solidFill>
+                          <a:latin typeface="Calibri"/>
+                        </a:defRPr>
+                      </a:pPr>
+                      <a:r>
+                        <a:t>0.63x</a:t>
+                      </a:r>
+                    </a:p>
+                  </a:txBody>
+                  <a:tcPr>
+                    <a:solidFill>
+                      <a:srgbClr val="ECF0F1"/>
+                    </a:solidFill>
+                  </a:tcPr>
+                </a:tc>
+                <a:tc>
+                  <a:txBody>
+                    <a:bodyPr/>
+                    <a:lstStyle/>
+                    <a:p>
+                      <a:pPr>
+                        <a:defRPr sz="800">
+                          <a:solidFill>
+                            <a:srgbClr val="2C3E50"/>
+                          </a:solidFill>
+                          <a:latin typeface="Calibri"/>
+                        </a:defRPr>
+                      </a:pPr>
+                      <a:r>
+                        <a:t>WA</a:t>
+                      </a:r>
+                    </a:p>
+                  </a:txBody>
+                  <a:tcPr>
+                    <a:solidFill>
+                      <a:srgbClr val="D5F5E3"/>
+                    </a:solidFill>
+                  </a:tcPr>
+                </a:tc>
+              </a:tr>
+              <a:tr h="201168">
+                <a:tc>
+                  <a:txBody>
+                    <a:bodyPr/>
+                    <a:lstStyle/>
+                    <a:p>
+                      <a:pPr>
+                        <a:defRPr sz="800">
+                          <a:solidFill>
+                            <a:srgbClr val="2C3E50"/>
+                          </a:solidFill>
+                          <a:latin typeface="Calibri"/>
+                        </a:defRPr>
+                      </a:pPr>
+                      <a:r>
+                        <a:t>syr2k</a:t>
+                      </a:r>
+                    </a:p>
+                  </a:txBody>
+                  <a:tcPr>
+                    <a:solidFill>
                       <a:srgbClr val="FFFFFF"/>
                     </a:solidFill>
                   </a:tcPr>
@@ -38187,7 +41373,7 @@
                         </a:defRPr>
                       </a:pPr>
                       <a:r>
-                        <a:t>4.540</a:t>
+                        <a:t>9.243</a:t>
                       </a:r>
                     </a:p>
                   </a:txBody>
@@ -38211,7 +41397,7 @@
                         </a:defRPr>
                       </a:pPr>
                       <a:r>
-                        <a:t>6.972</a:t>
+                        <a:t>9.046</a:t>
                       </a:r>
                     </a:p>
                   </a:txBody>
@@ -38235,13 +41421,451 @@
                         </a:defRPr>
                       </a:pPr>
                       <a:r>
-                        <a:t>0.65x</a:t>
+                        <a:t>1.02x</a:t>
                       </a:r>
                     </a:p>
                   </a:txBody>
                   <a:tcPr>
                     <a:solidFill>
                       <a:srgbClr val="FFFFFF"/>
+                    </a:solidFill>
+                  </a:tcPr>
+                </a:tc>
+                <a:tc>
+                  <a:txBody>
+                    <a:bodyPr/>
+                    <a:lstStyle/>
+                    <a:p>
+                      <a:pPr>
+                        <a:defRPr sz="800">
+                          <a:solidFill>
+                            <a:srgbClr val="2C3E50"/>
+                          </a:solidFill>
+                          <a:latin typeface="Calibri"/>
+                        </a:defRPr>
+                      </a:pPr>
+                      <a:r>
+                        <a:t>TIE</a:t>
+                      </a:r>
+                    </a:p>
+                  </a:txBody>
+                  <a:tcPr>
+                    <a:solidFill>
+                      <a:srgbClr val="FFFFFF"/>
+                    </a:solidFill>
+                  </a:tcPr>
+                </a:tc>
+              </a:tr>
+              <a:tr h="201168">
+                <a:tc>
+                  <a:txBody>
+                    <a:bodyPr/>
+                    <a:lstStyle/>
+                    <a:p>
+                      <a:pPr>
+                        <a:defRPr sz="800">
+                          <a:solidFill>
+                            <a:srgbClr val="2C3E50"/>
+                          </a:solidFill>
+                          <a:latin typeface="Calibri"/>
+                        </a:defRPr>
+                      </a:pPr>
+                      <a:r>
+                        <a:t>syrk</a:t>
+                      </a:r>
+                    </a:p>
+                  </a:txBody>
+                  <a:tcPr>
+                    <a:solidFill>
+                      <a:srgbClr val="ECF0F1"/>
+                    </a:solidFill>
+                  </a:tcPr>
+                </a:tc>
+                <a:tc>
+                  <a:txBody>
+                    <a:bodyPr/>
+                    <a:lstStyle/>
+                    <a:p>
+                      <a:pPr>
+                        <a:defRPr sz="800">
+                          <a:solidFill>
+                            <a:srgbClr val="2C3E50"/>
+                          </a:solidFill>
+                          <a:latin typeface="Calibri"/>
+                        </a:defRPr>
+                      </a:pPr>
+                      <a:r>
+                        <a:t>8x</a:t>
+                      </a:r>
+                    </a:p>
+                  </a:txBody>
+                  <a:tcPr>
+                    <a:solidFill>
+                      <a:srgbClr val="ECF0F1"/>
+                    </a:solidFill>
+                  </a:tcPr>
+                </a:tc>
+                <a:tc>
+                  <a:txBody>
+                    <a:bodyPr/>
+                    <a:lstStyle/>
+                    <a:p>
+                      <a:pPr>
+                        <a:defRPr sz="800">
+                          <a:solidFill>
+                            <a:srgbClr val="2C3E50"/>
+                          </a:solidFill>
+                          <a:latin typeface="Calibri"/>
+                        </a:defRPr>
+                      </a:pPr>
+                      <a:r>
+                        <a:t>0.242</a:t>
+                      </a:r>
+                    </a:p>
+                  </a:txBody>
+                  <a:tcPr>
+                    <a:solidFill>
+                      <a:srgbClr val="ECF0F1"/>
+                    </a:solidFill>
+                  </a:tcPr>
+                </a:tc>
+                <a:tc>
+                  <a:txBody>
+                    <a:bodyPr/>
+                    <a:lstStyle/>
+                    <a:p>
+                      <a:pPr>
+                        <a:defRPr sz="800">
+                          <a:solidFill>
+                            <a:srgbClr val="2C3E50"/>
+                          </a:solidFill>
+                          <a:latin typeface="Calibri"/>
+                        </a:defRPr>
+                      </a:pPr>
+                      <a:r>
+                        <a:t>2.084</a:t>
+                      </a:r>
+                    </a:p>
+                  </a:txBody>
+                  <a:tcPr>
+                    <a:solidFill>
+                      <a:srgbClr val="ECF0F1"/>
+                    </a:solidFill>
+                  </a:tcPr>
+                </a:tc>
+                <a:tc>
+                  <a:txBody>
+                    <a:bodyPr/>
+                    <a:lstStyle/>
+                    <a:p>
+                      <a:pPr>
+                        <a:defRPr sz="800">
+                          <a:solidFill>
+                            <a:srgbClr val="2C3E50"/>
+                          </a:solidFill>
+                          <a:latin typeface="Calibri"/>
+                        </a:defRPr>
+                      </a:pPr>
+                      <a:r>
+                        <a:t>0.12x</a:t>
+                      </a:r>
+                    </a:p>
+                  </a:txBody>
+                  <a:tcPr>
+                    <a:solidFill>
+                      <a:srgbClr val="ECF0F1"/>
+                    </a:solidFill>
+                  </a:tcPr>
+                </a:tc>
+                <a:tc>
+                  <a:txBody>
+                    <a:bodyPr/>
+                    <a:lstStyle/>
+                    <a:p>
+                      <a:pPr>
+                        <a:defRPr sz="800">
+                          <a:solidFill>
+                            <a:srgbClr val="2C3E50"/>
+                          </a:solidFill>
+                          <a:latin typeface="Calibri"/>
+                        </a:defRPr>
+                      </a:pPr>
+                      <a:r>
+                        <a:t>WA</a:t>
+                      </a:r>
+                    </a:p>
+                  </a:txBody>
+                  <a:tcPr>
+                    <a:solidFill>
+                      <a:srgbClr val="D5F5E3"/>
+                    </a:solidFill>
+                  </a:tcPr>
+                </a:tc>
+              </a:tr>
+              <a:tr h="201168">
+                <a:tc>
+                  <a:txBody>
+                    <a:bodyPr/>
+                    <a:lstStyle/>
+                    <a:p>
+                      <a:pPr>
+                        <a:defRPr sz="800">
+                          <a:solidFill>
+                            <a:srgbClr val="2C3E50"/>
+                          </a:solidFill>
+                          <a:latin typeface="Calibri"/>
+                        </a:defRPr>
+                      </a:pPr>
+                      <a:r>
+                        <a:t>trisolv</a:t>
+                      </a:r>
+                    </a:p>
+                  </a:txBody>
+                  <a:tcPr>
+                    <a:solidFill>
+                      <a:srgbClr val="FFFFFF"/>
+                    </a:solidFill>
+                  </a:tcPr>
+                </a:tc>
+                <a:tc>
+                  <a:txBody>
+                    <a:bodyPr/>
+                    <a:lstStyle/>
+                    <a:p>
+                      <a:pPr>
+                        <a:defRPr sz="800">
+                          <a:solidFill>
+                            <a:srgbClr val="2C3E50"/>
+                          </a:solidFill>
+                          <a:latin typeface="Calibri"/>
+                        </a:defRPr>
+                      </a:pPr>
+                      <a:r>
+                        <a:t>2x</a:t>
+                      </a:r>
+                    </a:p>
+                  </a:txBody>
+                  <a:tcPr>
+                    <a:solidFill>
+                      <a:srgbClr val="FFFFFF"/>
+                    </a:solidFill>
+                  </a:tcPr>
+                </a:tc>
+                <a:tc>
+                  <a:txBody>
+                    <a:bodyPr/>
+                    <a:lstStyle/>
+                    <a:p>
+                      <a:pPr>
+                        <a:defRPr sz="800">
+                          <a:solidFill>
+                            <a:srgbClr val="2C3E50"/>
+                          </a:solidFill>
+                          <a:latin typeface="Calibri"/>
+                        </a:defRPr>
+                      </a:pPr>
+                      <a:r>
+                        <a:t>0.800</a:t>
+                      </a:r>
+                    </a:p>
+                  </a:txBody>
+                  <a:tcPr>
+                    <a:solidFill>
+                      <a:srgbClr val="FFFFFF"/>
+                    </a:solidFill>
+                  </a:tcPr>
+                </a:tc>
+                <a:tc>
+                  <a:txBody>
+                    <a:bodyPr/>
+                    <a:lstStyle/>
+                    <a:p>
+                      <a:pPr>
+                        <a:defRPr sz="800">
+                          <a:solidFill>
+                            <a:srgbClr val="2C3E50"/>
+                          </a:solidFill>
+                          <a:latin typeface="Calibri"/>
+                        </a:defRPr>
+                      </a:pPr>
+                      <a:r>
+                        <a:t>3.060</a:t>
+                      </a:r>
+                    </a:p>
+                  </a:txBody>
+                  <a:tcPr>
+                    <a:solidFill>
+                      <a:srgbClr val="FFFFFF"/>
+                    </a:solidFill>
+                  </a:tcPr>
+                </a:tc>
+                <a:tc>
+                  <a:txBody>
+                    <a:bodyPr/>
+                    <a:lstStyle/>
+                    <a:p>
+                      <a:pPr>
+                        <a:defRPr sz="800">
+                          <a:solidFill>
+                            <a:srgbClr val="2C3E50"/>
+                          </a:solidFill>
+                          <a:latin typeface="Calibri"/>
+                        </a:defRPr>
+                      </a:pPr>
+                      <a:r>
+                        <a:t>0.26x</a:t>
+                      </a:r>
+                    </a:p>
+                  </a:txBody>
+                  <a:tcPr>
+                    <a:solidFill>
+                      <a:srgbClr val="FFFFFF"/>
+                    </a:solidFill>
+                  </a:tcPr>
+                </a:tc>
+                <a:tc>
+                  <a:txBody>
+                    <a:bodyPr/>
+                    <a:lstStyle/>
+                    <a:p>
+                      <a:pPr>
+                        <a:defRPr sz="800">
+                          <a:solidFill>
+                            <a:srgbClr val="2C3E50"/>
+                          </a:solidFill>
+                          <a:latin typeface="Calibri"/>
+                        </a:defRPr>
+                      </a:pPr>
+                      <a:r>
+                        <a:t>WA</a:t>
+                      </a:r>
+                    </a:p>
+                  </a:txBody>
+                  <a:tcPr>
+                    <a:solidFill>
+                      <a:srgbClr val="D5F5E3"/>
+                    </a:solidFill>
+                  </a:tcPr>
+                </a:tc>
+              </a:tr>
+              <a:tr h="201168">
+                <a:tc>
+                  <a:txBody>
+                    <a:bodyPr/>
+                    <a:lstStyle/>
+                    <a:p>
+                      <a:pPr>
+                        <a:defRPr sz="800">
+                          <a:solidFill>
+                            <a:srgbClr val="2C3E50"/>
+                          </a:solidFill>
+                          <a:latin typeface="Calibri"/>
+                        </a:defRPr>
+                      </a:pPr>
+                      <a:r>
+                        <a:t>trmm</a:t>
+                      </a:r>
+                    </a:p>
+                  </a:txBody>
+                  <a:tcPr>
+                    <a:solidFill>
+                      <a:srgbClr val="ECF0F1"/>
+                    </a:solidFill>
+                  </a:tcPr>
+                </a:tc>
+                <a:tc>
+                  <a:txBody>
+                    <a:bodyPr/>
+                    <a:lstStyle/>
+                    <a:p>
+                      <a:pPr>
+                        <a:defRPr sz="800">
+                          <a:solidFill>
+                            <a:srgbClr val="2C3E50"/>
+                          </a:solidFill>
+                          <a:latin typeface="Calibri"/>
+                        </a:defRPr>
+                      </a:pPr>
+                      <a:r>
+                        <a:t>8x</a:t>
+                      </a:r>
+                    </a:p>
+                  </a:txBody>
+                  <a:tcPr>
+                    <a:solidFill>
+                      <a:srgbClr val="ECF0F1"/>
+                    </a:solidFill>
+                  </a:tcPr>
+                </a:tc>
+                <a:tc>
+                  <a:txBody>
+                    <a:bodyPr/>
+                    <a:lstStyle/>
+                    <a:p>
+                      <a:pPr>
+                        <a:defRPr sz="800">
+                          <a:solidFill>
+                            <a:srgbClr val="2C3E50"/>
+                          </a:solidFill>
+                          <a:latin typeface="Calibri"/>
+                        </a:defRPr>
+                      </a:pPr>
+                      <a:r>
+                        <a:t>3.965</a:t>
+                      </a:r>
+                    </a:p>
+                  </a:txBody>
+                  <a:tcPr>
+                    <a:solidFill>
+                      <a:srgbClr val="ECF0F1"/>
+                    </a:solidFill>
+                  </a:tcPr>
+                </a:tc>
+                <a:tc>
+                  <a:txBody>
+                    <a:bodyPr/>
+                    <a:lstStyle/>
+                    <a:p>
+                      <a:pPr>
+                        <a:defRPr sz="800">
+                          <a:solidFill>
+                            <a:srgbClr val="2C3E50"/>
+                          </a:solidFill>
+                          <a:latin typeface="Calibri"/>
+                        </a:defRPr>
+                      </a:pPr>
+                      <a:r>
+                        <a:t>4.455</a:t>
+                      </a:r>
+                    </a:p>
+                  </a:txBody>
+                  <a:tcPr>
+                    <a:solidFill>
+                      <a:srgbClr val="ECF0F1"/>
+                    </a:solidFill>
+                  </a:tcPr>
+                </a:tc>
+                <a:tc>
+                  <a:txBody>
+                    <a:bodyPr/>
+                    <a:lstStyle/>
+                    <a:p>
+                      <a:pPr>
+                        <a:defRPr sz="800">
+                          <a:solidFill>
+                            <a:srgbClr val="2C3E50"/>
+                          </a:solidFill>
+                          <a:latin typeface="Calibri"/>
+                        </a:defRPr>
+                      </a:pPr>
+                      <a:r>
+                        <a:t>0.89x</a:t>
+                      </a:r>
+                    </a:p>
+                  </a:txBody>
+                  <a:tcPr>
+                    <a:solidFill>
+                      <a:srgbClr val="ECF0F1"/>
                     </a:solidFill>
                   </a:tcPr>
                 </a:tc>
@@ -38282,7 +41906,7 @@
         </p:nvSpPr>
         <p:spPr>
           <a:xfrm>
-            <a:off x="457200" y="3657600"/>
+            <a:off x="457200" y="7379208"/>
             <a:ext cx="8229600" cy="228600"/>
           </a:xfrm>
           <a:prstGeom prst="rect">
@@ -38321,7 +41945,7 @@
         </p:nvSpPr>
         <p:spPr>
           <a:xfrm>
-            <a:off x="457200" y="3931920"/>
+            <a:off x="457200" y="7653528"/>
             <a:ext cx="8229600" cy="731520"/>
           </a:xfrm>
           <a:prstGeom prst="rect">
@@ -38350,7 +41974,7 @@
                 </a:solidFill>
                 <a:latin typeface="Calibri"/>
               </a:rPr>
-              <a:t>Kernels compared: 5 (both WA and NA completed at large size)</a:t>
+              <a:t>All 30 kernels attempted. Valid comparisons: 25 (both pass small-size and complete large-size)</a:t>
             </a:r>
           </a:p>
           <a:p>
@@ -38369,7 +41993,26 @@
                 </a:solidFill>
                 <a:latin typeface="Calibri"/>
               </a:rPr>
-              <a:t>WA wins (faster Triton): 2 | NA wins: 3 | Ties (&lt;5% diff): 0</a:t>
+              <a:t>WA wins (faster Triton): 14 | NA wins: 3 | Ties (&lt;5% diff): 8 | WA-only: 5</a:t>
+            </a:r>
+          </a:p>
+          <a:p>
+            <a:pPr>
+              <a:lnSpc>
+                <a:spcPts val="1300"/>
+              </a:lnSpc>
+              <a:spcAft>
+                <a:spcPts val="400"/>
+              </a:spcAft>
+            </a:pPr>
+            <a:r>
+              <a:rPr sz="1000">
+                <a:solidFill>
+                  <a:srgbClr val="2C3E50"/>
+                </a:solidFill>
+                <a:latin typeface="Calibri"/>
+              </a:rPr>
+              <a:t>* = code failed small-size validation (timing unreliable)</a:t>
             </a:r>
           </a:p>
         </p:txBody>
@@ -38434,7 +42077,7 @@
                 </a:solidFill>
                 <a:latin typeface="Calibri"/>
               </a:rPr>
-              <a:t>At large sizes, WA wins 2/5 (40%) kernel comparisons. Analysis-guided code maintains advantage at realistic GPU workloads.</a:t>
+              <a:t>At large sizes, WA wins 14/25 (56%) kernel comparisons. Analysis-guided code maintains advantage at realistic GPU workloads.</a:t>
             </a:r>
           </a:p>
         </p:txBody>
